--- a/assets/fiches/E6-fiche-1h30.pptx
+++ b/assets/fiches/E6-fiche-1h30.pptx
@@ -5765,7 +5765,7 @@
           <p:nvPr/>
         </p:nvGraphicFramePr>
         <p:xfrm>
-          <a:off x="-10000000" y="7868790"/>
+          <a:off x="533400" y="7868790"/>
           <a:ext cx="6457950" cy="1663063"/>
         </p:xfrm>
         <a:graphic>
@@ -6051,27 +6051,7 @@
                           <a:latin typeface="Arial"/>
                           <a:cs typeface="Arial"/>
                         </a:rPr>
-                        <a:t>15</a:t>
-                      </a:r>
-                      <a:r>
-                        <a:rPr sz="850" b="1" spc="-10" dirty="0">
-                          <a:solidFill>
-                            <a:srgbClr val="E67D21"/>
-                          </a:solidFill>
-                          <a:latin typeface="Arial"/>
-                          <a:cs typeface="Arial"/>
-                        </a:rPr>
-                        <a:t> </a:t>
-                      </a:r>
-                      <a:r>
-                        <a:rPr sz="850" b="1" spc="-25" dirty="0">
-                          <a:solidFill>
-                            <a:srgbClr val="E67D21"/>
-                          </a:solidFill>
-                          <a:latin typeface="Arial"/>
-                          <a:cs typeface="Arial"/>
-                        </a:rPr>
-                        <a:t>min</a:t>
+                        <a:t>8 min</a:t>
                       </a:r>
                       <a:endParaRPr sz="850">
                         <a:latin typeface="Arial"/>
@@ -6092,7 +6072,7 @@
                           <a:latin typeface="Arial"/>
                           <a:cs typeface="Arial"/>
                         </a:rPr>
-                        <a:t>Teleconsultation</a:t>
+                        <a:t>Le numérique responsable en entreprise</a:t>
                       </a:r>
                       <a:endParaRPr sz="1050">
                         <a:latin typeface="Arial"/>
@@ -6121,140 +6101,17 @@
                         </a:rPr>
                         <a:t>OPT.</a:t>
                       </a:r>
-                      <a:r>
-                        <a:rPr sz="1200" b="1" baseline="13888" dirty="0">
-                          <a:solidFill>
-                            <a:srgbClr val="FFFFFF"/>
-                          </a:solidFill>
-                          <a:latin typeface="Arial"/>
-                          <a:cs typeface="Arial"/>
-                        </a:rPr>
-                        <a:t>	</a:t>
-                      </a:r>
-                      <a:r>
-                        <a:rPr sz="900" dirty="0">
-                          <a:solidFill>
-                            <a:srgbClr val="2B2B2B"/>
-                          </a:solidFill>
-                          <a:latin typeface="Arial"/>
-                          <a:cs typeface="Arial"/>
-                        </a:rPr>
-                        <a:t>.</a:t>
-                      </a:r>
-                      <a:r>
-                        <a:rPr sz="900" spc="-5" dirty="0">
-                          <a:solidFill>
-                            <a:srgbClr val="2B2B2B"/>
-                          </a:solidFill>
-                          <a:latin typeface="Arial"/>
-                          <a:cs typeface="Arial"/>
-                        </a:rPr>
-                        <a:t> </a:t>
-                      </a:r>
-                      <a:r>
-                        <a:rPr sz="900" dirty="0">
-                          <a:solidFill>
-                            <a:srgbClr val="2B2B2B"/>
-                          </a:solidFill>
-                          <a:latin typeface="Arial"/>
-                          <a:cs typeface="Arial"/>
-                        </a:rPr>
-                        <a:t>Expliquer</a:t>
-                      </a:r>
-                      <a:r>
-                        <a:rPr sz="900" spc="-5" dirty="0">
-                          <a:solidFill>
-                            <a:srgbClr val="2B2B2B"/>
-                          </a:solidFill>
-                          <a:latin typeface="Arial"/>
-                          <a:cs typeface="Arial"/>
-                        </a:rPr>
-                        <a:t> </a:t>
-                      </a:r>
-                      <a:r>
-                        <a:rPr sz="900" dirty="0">
-                          <a:solidFill>
-                            <a:srgbClr val="2B2B2B"/>
-                          </a:solidFill>
-                          <a:latin typeface="Arial"/>
-                          <a:cs typeface="Arial"/>
-                        </a:rPr>
-                        <a:t>ce qu'est</a:t>
-                      </a:r>
-                      <a:r>
-                        <a:rPr sz="900" spc="-5" dirty="0">
-                          <a:solidFill>
-                            <a:srgbClr val="2B2B2B"/>
-                          </a:solidFill>
-                          <a:latin typeface="Arial"/>
-                          <a:cs typeface="Arial"/>
-                        </a:rPr>
-                        <a:t> </a:t>
-                      </a:r>
-                      <a:r>
-                        <a:rPr sz="900" dirty="0">
-                          <a:solidFill>
-                            <a:srgbClr val="2B2B2B"/>
-                          </a:solidFill>
-                          <a:latin typeface="Arial"/>
-                          <a:cs typeface="Arial"/>
-                        </a:rPr>
-                        <a:t>la teleconsultation</a:t>
-                      </a:r>
-                      <a:r>
-                        <a:rPr sz="900" spc="-5" dirty="0">
-                          <a:solidFill>
-                            <a:srgbClr val="2B2B2B"/>
-                          </a:solidFill>
-                          <a:latin typeface="Arial"/>
-                          <a:cs typeface="Arial"/>
-                        </a:rPr>
-                        <a:t> </a:t>
-                      </a:r>
-                      <a:r>
-                        <a:rPr sz="900" dirty="0">
-                          <a:solidFill>
-                            <a:srgbClr val="2B2B2B"/>
-                          </a:solidFill>
-                          <a:latin typeface="Arial"/>
-                          <a:cs typeface="Arial"/>
-                        </a:rPr>
-                        <a:t>et</a:t>
-                      </a:r>
-                      <a:r>
-                        <a:rPr sz="900" spc="-5" dirty="0">
-                          <a:solidFill>
-                            <a:srgbClr val="2B2B2B"/>
-                          </a:solidFill>
-                          <a:latin typeface="Arial"/>
-                          <a:cs typeface="Arial"/>
-                        </a:rPr>
-                        <a:t> </a:t>
-                      </a:r>
-                      <a:r>
-                        <a:rPr sz="900" dirty="0">
-                          <a:solidFill>
-                            <a:srgbClr val="2B2B2B"/>
-                          </a:solidFill>
-                          <a:latin typeface="Arial"/>
-                          <a:cs typeface="Arial"/>
-                        </a:rPr>
-                        <a:t>son </a:t>
-                      </a:r>
-                      <a:r>
-                        <a:rPr sz="900" spc="-10" dirty="0">
-                          <a:solidFill>
-                            <a:srgbClr val="2B2B2B"/>
-                          </a:solidFill>
-                          <a:latin typeface="Arial"/>
-                          <a:cs typeface="Arial"/>
-                        </a:rPr>
-                        <a:t>remboursement</a:t>
-                      </a:r>
                       <a:endParaRPr sz="900">
                         <a:latin typeface="Arial"/>
                         <a:cs typeface="Arial"/>
                       </a:endParaRPr>
+                      <a:r>
+                        <a:rPr sz="900" spc="-30" baseline="13888" dirty="0">
+                          <a:latin typeface="Arial"/>
+                          <a:cs typeface="Arial"/>
+                        </a:rPr>
+                        <a:t>	. Intégrer le numérique responsable au sein de votre organisation permet de r…</a:t>
+                      </a:r>
                     </a:p>
                     <a:p>
                       <a:pPr marL="755650">
@@ -6270,17 +6127,7 @@
                           <a:latin typeface="Arial"/>
                           <a:cs typeface="Arial"/>
                         </a:rPr>
-                        <a:t>. Montrer comment reperer un medecin proposant la </a:t>
-                      </a:r>
-                      <a:r>
-                        <a:rPr sz="900" spc="-10" dirty="0">
-                          <a:solidFill>
-                            <a:srgbClr val="2B2B2B"/>
-                          </a:solidFill>
-                          <a:latin typeface="Arial"/>
-                          <a:cs typeface="Arial"/>
-                        </a:rPr>
-                        <a:t>video</a:t>
+                        <a:t>. Politique d'achat responsable</a:t>
                       </a:r>
                       <a:endParaRPr sz="900">
                         <a:latin typeface="Arial"/>
@@ -6301,17 +6148,7 @@
                           <a:latin typeface="Arial"/>
                           <a:cs typeface="Arial"/>
                         </a:rPr>
-                        <a:t>. Simuler la reception du lien et le demarrage de la </a:t>
-                      </a:r>
-                      <a:r>
-                        <a:rPr sz="900" spc="-10" dirty="0">
-                          <a:solidFill>
-                            <a:srgbClr val="2B2B2B"/>
-                          </a:solidFill>
-                          <a:latin typeface="Arial"/>
-                          <a:cs typeface="Arial"/>
-                        </a:rPr>
-                        <a:t>session</a:t>
+                        <a:t>. Privilégiez les équipements reconditionnés ou conçus pour durer. Demandez d…</a:t>
                       </a:r>
                       <a:endParaRPr sz="900">
                         <a:latin typeface="Arial"/>
@@ -6366,36 +6203,6 @@
                           <a:spcPts val="250"/>
                         </a:spcBef>
                       </a:pPr>
-                      <a:r>
-                        <a:rPr sz="850" b="1" dirty="0">
-                          <a:solidFill>
-                            <a:srgbClr val="E67D21"/>
-                          </a:solidFill>
-                          <a:latin typeface="Arial"/>
-                          <a:cs typeface="Arial"/>
-                        </a:rPr>
-                        <a:t>10</a:t>
-                      </a:r>
-                      <a:r>
-                        <a:rPr sz="850" b="1" spc="-10" dirty="0">
-                          <a:solidFill>
-                            <a:srgbClr val="E67D21"/>
-                          </a:solidFill>
-                          <a:latin typeface="Arial"/>
-                          <a:cs typeface="Arial"/>
-                        </a:rPr>
-                        <a:t> </a:t>
-                      </a:r>
-                      <a:r>
-                        <a:rPr sz="850" b="1" spc="-25" dirty="0">
-                          <a:solidFill>
-                            <a:srgbClr val="E67D21"/>
-                          </a:solidFill>
-                          <a:latin typeface="Arial"/>
-                          <a:cs typeface="Arial"/>
-                        </a:rPr>
-                        <a:t>min</a:t>
-                      </a:r>
                       <a:endParaRPr sz="850">
                         <a:latin typeface="Arial"/>
                         <a:cs typeface="Arial"/>
@@ -6407,76 +6214,6 @@
                           <a:spcPts val="1200"/>
                         </a:lnSpc>
                       </a:pPr>
-                      <a:r>
-                        <a:rPr sz="1050" b="1" dirty="0">
-                          <a:solidFill>
-                            <a:srgbClr val="2B2B2B"/>
-                          </a:solidFill>
-                          <a:latin typeface="Arial"/>
-                          <a:cs typeface="Arial"/>
-                        </a:rPr>
-                        <a:t>Acceder</a:t>
-                      </a:r>
-                      <a:r>
-                        <a:rPr sz="1050" b="1" spc="-25" dirty="0">
-                          <a:solidFill>
-                            <a:srgbClr val="2B2B2B"/>
-                          </a:solidFill>
-                          <a:latin typeface="Arial"/>
-                          <a:cs typeface="Arial"/>
-                        </a:rPr>
-                        <a:t> </a:t>
-                      </a:r>
-                      <a:r>
-                        <a:rPr sz="1050" b="1" dirty="0">
-                          <a:solidFill>
-                            <a:srgbClr val="2B2B2B"/>
-                          </a:solidFill>
-                          <a:latin typeface="Arial"/>
-                          <a:cs typeface="Arial"/>
-                        </a:rPr>
-                        <a:t>a</a:t>
-                      </a:r>
-                      <a:r>
-                        <a:rPr sz="1050" b="1" spc="-25" dirty="0">
-                          <a:solidFill>
-                            <a:srgbClr val="2B2B2B"/>
-                          </a:solidFill>
-                          <a:latin typeface="Arial"/>
-                          <a:cs typeface="Arial"/>
-                        </a:rPr>
-                        <a:t> </a:t>
-                      </a:r>
-                      <a:r>
-                        <a:rPr sz="1050" b="1" dirty="0">
-                          <a:solidFill>
-                            <a:srgbClr val="2B2B2B"/>
-                          </a:solidFill>
-                          <a:latin typeface="Arial"/>
-                          <a:cs typeface="Arial"/>
-                        </a:rPr>
-                        <a:t>mes</a:t>
-                      </a:r>
-                      <a:r>
-                        <a:rPr sz="1050" b="1" spc="-20" dirty="0">
-                          <a:solidFill>
-                            <a:srgbClr val="2B2B2B"/>
-                          </a:solidFill>
-                          <a:latin typeface="Arial"/>
-                          <a:cs typeface="Arial"/>
-                        </a:rPr>
-                        <a:t> </a:t>
-                      </a:r>
-                      <a:r>
-                        <a:rPr sz="1050" b="1" spc="-10" dirty="0">
-                          <a:solidFill>
-                            <a:srgbClr val="2B2B2B"/>
-                          </a:solidFill>
-                          <a:latin typeface="Arial"/>
-                          <a:cs typeface="Arial"/>
-                        </a:rPr>
-                        <a:t>documents</a:t>
-                      </a:r>
                       <a:endParaRPr sz="1050">
                         <a:latin typeface="Arial"/>
                         <a:cs typeface="Arial"/>
@@ -6494,46 +6231,6 @@
                           <a:tab pos="524510" algn="l"/>
                         </a:tabLst>
                       </a:pPr>
-                      <a:r>
-                        <a:rPr sz="1200" b="1" spc="-30" baseline="13888" dirty="0">
-                          <a:solidFill>
-                            <a:srgbClr val="FFFFFF"/>
-                          </a:solidFill>
-                          <a:latin typeface="Arial"/>
-                          <a:cs typeface="Arial"/>
-                        </a:rPr>
-                        <a:t>OPT.</a:t>
-                      </a:r>
-                      <a:r>
-                        <a:rPr sz="1200" b="1" baseline="13888" dirty="0">
-                          <a:solidFill>
-                            <a:srgbClr val="FFFFFF"/>
-                          </a:solidFill>
-                          <a:latin typeface="Arial"/>
-                          <a:cs typeface="Arial"/>
-                        </a:rPr>
-                        <a:t>	</a:t>
-                      </a:r>
-                      <a:r>
-                        <a:rPr sz="900" dirty="0">
-                          <a:solidFill>
-                            <a:srgbClr val="2B2B2B"/>
-                          </a:solidFill>
-                          <a:latin typeface="Arial"/>
-                          <a:cs typeface="Arial"/>
-                        </a:rPr>
-                        <a:t>. Naviguer vers Mon espace sante &gt; Mes </a:t>
-                      </a:r>
-                      <a:r>
-                        <a:rPr sz="900" spc="-10" dirty="0">
-                          <a:solidFill>
-                            <a:srgbClr val="2B2B2B"/>
-                          </a:solidFill>
-                          <a:latin typeface="Arial"/>
-                          <a:cs typeface="Arial"/>
-                        </a:rPr>
-                        <a:t>documents</a:t>
-                      </a:r>
                       <a:endParaRPr sz="900">
                         <a:latin typeface="Arial"/>
                         <a:cs typeface="Arial"/>
@@ -6545,26 +6242,6 @@
                           <a:spcPts val="1050"/>
                         </a:lnSpc>
                       </a:pPr>
-                      <a:r>
-                        <a:rPr sz="900" dirty="0">
-                          <a:solidFill>
-                            <a:srgbClr val="2B2B2B"/>
-                          </a:solidFill>
-                          <a:latin typeface="Arial"/>
-                          <a:cs typeface="Arial"/>
-                        </a:rPr>
-                        <a:t>. Retrouver une ordonnance ou un resultat </a:t>
-                      </a:r>
-                      <a:r>
-                        <a:rPr sz="900" spc="-10" dirty="0">
-                          <a:solidFill>
-                            <a:srgbClr val="2B2B2B"/>
-                          </a:solidFill>
-                          <a:latin typeface="Arial"/>
-                          <a:cs typeface="Arial"/>
-                        </a:rPr>
-                        <a:t>d'analyse</a:t>
-                      </a:r>
                       <a:endParaRPr sz="900">
                         <a:latin typeface="Arial"/>
                         <a:cs typeface="Arial"/>
@@ -6576,26 +6253,6 @@
                           <a:spcPts val="885"/>
                         </a:lnSpc>
                       </a:pPr>
-                      <a:r>
-                        <a:rPr sz="900" dirty="0">
-                          <a:solidFill>
-                            <a:srgbClr val="2B2B2B"/>
-                          </a:solidFill>
-                          <a:latin typeface="Arial"/>
-                          <a:cs typeface="Arial"/>
-                        </a:rPr>
-                        <a:t>. Telecharger ou imprimer un document depuis </a:t>
-                      </a:r>
-                      <a:r>
-                        <a:rPr sz="900" spc="-10" dirty="0">
-                          <a:solidFill>
-                            <a:srgbClr val="2B2B2B"/>
-                          </a:solidFill>
-                          <a:latin typeface="Arial"/>
-                          <a:cs typeface="Arial"/>
-                        </a:rPr>
-                        <a:t>Doctolib</a:t>
-                      </a:r>
                       <a:endParaRPr sz="900">
                         <a:latin typeface="Arial"/>
                         <a:cs typeface="Arial"/>

--- a/assets/fiches/E6-fiche-1h30.pptx
+++ b/assets/fiches/E6-fiche-1h30.pptx
@@ -6232,7 +6232,7 @@
         <p:spPr>
           <a:xfrm>
             <a:off x="529200" y="2127600"/>
-            <a:ext cx="6498000" cy="828000"/>
+            <a:ext cx="6498000" cy="1065600"/>
           </a:xfrm>
           <a:prstGeom prst="rect">
             <a:avLst/>
@@ -6399,7 +6399,7 @@
         <p:spPr>
           <a:xfrm>
             <a:off x="637200" y="2368800"/>
-            <a:ext cx="6300000" cy="529200"/>
+            <a:ext cx="6300000" cy="766800"/>
           </a:xfrm>
           <a:prstGeom prst="rect">
             <a:avLst/>

--- a/assets/fiches/E6-fiche-1h30.pptx
+++ b/assets/fiches/E6-fiche-1h30.pptx
@@ -6232,7 +6232,7 @@
         <p:spPr>
           <a:xfrm>
             <a:off x="529200" y="2127600"/>
-            <a:ext cx="6498000" cy="1065600"/>
+            <a:ext cx="6498000" cy="2728799"/>
           </a:xfrm>
           <a:prstGeom prst="rect">
             <a:avLst/>
@@ -6427,6 +6427,174 @@
                 </a:solidFill>
                 <a:latin typeface="Arial"/>
               </a:rPr>
+              <a:t>5 min</a:t>
+            </a:r>
+          </a:p>
+          <a:p>
+            <a:pPr algn="l">
+              <a:spcBef>
+                <a:spcPts val="0"/>
+              </a:spcBef>
+              <a:spcAft>
+                <a:spcPts val="100"/>
+              </a:spcAft>
+            </a:pPr>
+            <a:r>
+              <a:rPr sz="900" b="1" i="0">
+                <a:solidFill>
+                  <a:srgbClr val="2B2B2B"/>
+                </a:solidFill>
+                <a:latin typeface="Arial"/>
+              </a:rPr>
+              <a:t>Des ressources rares et précieuses</a:t>
+            </a:r>
+          </a:p>
+          <a:p>
+            <a:pPr>
+              <a:spcBef>
+                <a:spcPts val="0"/>
+              </a:spcBef>
+              <a:spcAft>
+                <a:spcPts val="100"/>
+              </a:spcAft>
+            </a:pPr>
+            <a:r>
+              <a:rPr sz="800" b="1">
+                <a:solidFill>
+                  <a:srgbClr val="E67D21"/>
+                </a:solidFill>
+                <a:latin typeface="Arial"/>
+              </a:rPr>
+              <a:t>OPT.  </a:t>
+            </a:r>
+            <a:r>
+              <a:rPr sz="800">
+                <a:solidFill>
+                  <a:srgbClr val="2B2B2B"/>
+                </a:solidFill>
+                <a:latin typeface="Arial"/>
+              </a:rPr>
+              <a:t>. Derrière chaque écran, chaque circuit imprimé, se cache un monde de minerai…</a:t>
+            </a:r>
+          </a:p>
+          <a:p>
+            <a:pPr algn="l">
+              <a:spcBef>
+                <a:spcPts val="0"/>
+              </a:spcBef>
+              <a:spcAft>
+                <a:spcPts val="100"/>
+              </a:spcAft>
+            </a:pPr>
+            <a:r>
+              <a:rPr sz="800" b="0" i="0">
+                <a:solidFill>
+                  <a:srgbClr val="2B2B2B"/>
+                </a:solidFill>
+                <a:latin typeface="Arial"/>
+              </a:rPr>
+              <a:t>. Un cocktail de métaux stratégiques</a:t>
+            </a:r>
+          </a:p>
+          <a:p>
+            <a:pPr algn="l">
+              <a:spcBef>
+                <a:spcPts val="0"/>
+              </a:spcBef>
+              <a:spcAft>
+                <a:spcPts val="100"/>
+              </a:spcAft>
+            </a:pPr>
+            <a:r>
+              <a:rPr sz="800" b="0" i="0">
+                <a:solidFill>
+                  <a:srgbClr val="2B2B2B"/>
+                </a:solidFill>
+                <a:latin typeface="Arial"/>
+              </a:rPr>
+              <a:t>. Nos appareils dépendent de ressources comme le lithium (batteries), le coba…</a:t>
+            </a:r>
+          </a:p>
+        </p:txBody>
+      </p:sp>
+      <p:sp>
+        <p:nvSpPr>
+          <p:cNvPr id="17" name="Rectangle 16"/>
+          <p:cNvSpPr/>
+          <p:nvPr/>
+        </p:nvSpPr>
+        <p:spPr>
+          <a:xfrm>
+            <a:off x="529200" y="3157200"/>
+            <a:ext cx="6498000" cy="14400"/>
+          </a:xfrm>
+          <a:prstGeom prst="rect">
+            <a:avLst/>
+          </a:prstGeom>
+          <a:solidFill>
+            <a:srgbClr val="E67D21"/>
+          </a:solidFill>
+          <a:ln>
+            <a:noFill/>
+          </a:ln>
+        </p:spPr>
+        <p:style>
+          <a:lnRef idx="1">
+            <a:schemeClr val="accent1"/>
+          </a:lnRef>
+          <a:fillRef idx="3">
+            <a:schemeClr val="accent1"/>
+          </a:fillRef>
+          <a:effectRef idx="2">
+            <a:schemeClr val="accent1"/>
+          </a:effectRef>
+          <a:fontRef idx="minor">
+            <a:schemeClr val="lt1"/>
+          </a:fontRef>
+        </p:style>
+        <p:txBody>
+          <a:bodyPr rtlCol="0" anchor="ctr"/>
+          <a:lstStyle/>
+          <a:p/>
+        </p:txBody>
+      </p:sp>
+      <p:sp>
+        <p:nvSpPr>
+          <p:cNvPr id="18" name="TextBox 17"/>
+          <p:cNvSpPr txBox="1"/>
+          <p:nvPr/>
+        </p:nvSpPr>
+        <p:spPr>
+          <a:xfrm>
+            <a:off x="637200" y="3200399"/>
+            <a:ext cx="6300000" cy="766800"/>
+          </a:xfrm>
+          <a:prstGeom prst="rect">
+            <a:avLst/>
+          </a:prstGeom>
+          <a:noFill/>
+        </p:spPr>
+        <p:txBody>
+          <a:bodyPr wrap="square" tIns="0" bIns="0" lIns="18000" rIns="18000">
+            <a:spAutoFit/>
+          </a:bodyPr>
+          <a:lstStyle/>
+          <a:p>
+            <a:pPr algn="l">
+              <a:spcBef>
+                <a:spcPts val="0"/>
+              </a:spcBef>
+              <a:spcAft>
+                <a:spcPts val="100"/>
+              </a:spcAft>
+            </a:pPr>
+            <a:r>
+              <a:rPr sz="800" b="1" i="0">
+                <a:solidFill>
+                  <a:srgbClr val="E67D21"/>
+                </a:solidFill>
+                <a:latin typeface="Arial"/>
+              </a:rPr>
               <a:t>8 min</a:t>
             </a:r>
           </a:p>
@@ -6519,7 +6687,175 @@
       </p:sp>
       <p:sp>
         <p:nvSpPr>
-          <p:cNvPr id="17" name="Rectangle 16"/>
+          <p:cNvPr id="19" name="Rectangle 18"/>
+          <p:cNvSpPr/>
+          <p:nvPr/>
+        </p:nvSpPr>
+        <p:spPr>
+          <a:xfrm>
+            <a:off x="529200" y="3988800"/>
+            <a:ext cx="6498000" cy="14400"/>
+          </a:xfrm>
+          <a:prstGeom prst="rect">
+            <a:avLst/>
+          </a:prstGeom>
+          <a:solidFill>
+            <a:srgbClr val="E67D21"/>
+          </a:solidFill>
+          <a:ln>
+            <a:noFill/>
+          </a:ln>
+        </p:spPr>
+        <p:style>
+          <a:lnRef idx="1">
+            <a:schemeClr val="accent1"/>
+          </a:lnRef>
+          <a:fillRef idx="3">
+            <a:schemeClr val="accent1"/>
+          </a:fillRef>
+          <a:effectRef idx="2">
+            <a:schemeClr val="accent1"/>
+          </a:effectRef>
+          <a:fontRef idx="minor">
+            <a:schemeClr val="lt1"/>
+          </a:fontRef>
+        </p:style>
+        <p:txBody>
+          <a:bodyPr rtlCol="0" anchor="ctr"/>
+          <a:lstStyle/>
+          <a:p/>
+        </p:txBody>
+      </p:sp>
+      <p:sp>
+        <p:nvSpPr>
+          <p:cNvPr id="20" name="TextBox 19"/>
+          <p:cNvSpPr txBox="1"/>
+          <p:nvPr/>
+        </p:nvSpPr>
+        <p:spPr>
+          <a:xfrm>
+            <a:off x="637200" y="4031999"/>
+            <a:ext cx="6300000" cy="766800"/>
+          </a:xfrm>
+          <a:prstGeom prst="rect">
+            <a:avLst/>
+          </a:prstGeom>
+          <a:noFill/>
+        </p:spPr>
+        <p:txBody>
+          <a:bodyPr wrap="square" tIns="0" bIns="0" lIns="18000" rIns="18000">
+            <a:spAutoFit/>
+          </a:bodyPr>
+          <a:lstStyle/>
+          <a:p>
+            <a:pPr algn="l">
+              <a:spcBef>
+                <a:spcPts val="0"/>
+              </a:spcBef>
+              <a:spcAft>
+                <a:spcPts val="100"/>
+              </a:spcAft>
+            </a:pPr>
+            <a:r>
+              <a:rPr sz="800" b="1" i="0">
+                <a:solidFill>
+                  <a:srgbClr val="E67D21"/>
+                </a:solidFill>
+                <a:latin typeface="Arial"/>
+              </a:rPr>
+              <a:t>5 min</a:t>
+            </a:r>
+          </a:p>
+          <a:p>
+            <a:pPr algn="l">
+              <a:spcBef>
+                <a:spcPts val="0"/>
+              </a:spcBef>
+              <a:spcAft>
+                <a:spcPts val="100"/>
+              </a:spcAft>
+            </a:pPr>
+            <a:r>
+              <a:rPr sz="900" b="1" i="0">
+                <a:solidFill>
+                  <a:srgbClr val="2B2B2B"/>
+                </a:solidFill>
+                <a:latin typeface="Arial"/>
+              </a:rPr>
+              <a:t>Pour aller plus loin — Sources</a:t>
+            </a:r>
+          </a:p>
+          <a:p>
+            <a:pPr>
+              <a:spcBef>
+                <a:spcPts val="0"/>
+              </a:spcBef>
+              <a:spcAft>
+                <a:spcPts val="100"/>
+              </a:spcAft>
+            </a:pPr>
+            <a:r>
+              <a:rPr sz="800" b="1">
+                <a:solidFill>
+                  <a:srgbClr val="E67D21"/>
+                </a:solidFill>
+                <a:latin typeface="Arial"/>
+              </a:rPr>
+              <a:t>OPT.  </a:t>
+            </a:r>
+            <a:r>
+              <a:rPr sz="800">
+                <a:solidFill>
+                  <a:srgbClr val="2B2B2B"/>
+                </a:solidFill>
+                <a:latin typeface="Arial"/>
+              </a:rPr>
+              <a:t>. Le numérique responsable, c'est l'affaire de tous. Chaque geste compte, cha…</a:t>
+            </a:r>
+          </a:p>
+          <a:p>
+            <a:pPr algn="l">
+              <a:spcBef>
+                <a:spcPts val="0"/>
+              </a:spcBef>
+              <a:spcAft>
+                <a:spcPts val="100"/>
+              </a:spcAft>
+            </a:pPr>
+            <a:r>
+              <a:rPr sz="800" b="0" i="0">
+                <a:solidFill>
+                  <a:srgbClr val="2B2B2B"/>
+                </a:solidFill>
+                <a:latin typeface="Arial"/>
+              </a:rPr>
+              <a:t>. ADEME-Arcep, Évaluation de l'impact environnemental du numérique en France,…</a:t>
+            </a:r>
+          </a:p>
+          <a:p>
+            <a:pPr algn="l">
+              <a:spcBef>
+                <a:spcPts val="0"/>
+              </a:spcBef>
+              <a:spcAft>
+                <a:spcPts val="100"/>
+              </a:spcAft>
+            </a:pPr>
+            <a:r>
+              <a:rPr sz="800" b="0" i="0">
+                <a:solidFill>
+                  <a:srgbClr val="2B2B2B"/>
+                </a:solidFill>
+                <a:latin typeface="Arial"/>
+              </a:rPr>
+              <a:t>. GreenIT.fr, Benchmark Green IT 2024, Novembre 2024 — greenit.fr</a:t>
+            </a:r>
+          </a:p>
+        </p:txBody>
+      </p:sp>
+      <p:sp>
+        <p:nvSpPr>
+          <p:cNvPr id="21" name="Rectangle 20"/>
           <p:cNvSpPr/>
           <p:nvPr/>
         </p:nvSpPr>
@@ -6560,7 +6896,7 @@
       </p:sp>
       <p:sp>
         <p:nvSpPr>
-          <p:cNvPr id="18" name="TextBox 17"/>
+          <p:cNvPr id="22" name="TextBox 21"/>
           <p:cNvSpPr txBox="1"/>
           <p:nvPr/>
         </p:nvSpPr>

--- a/assets/fiches/E6-fiche-1h30.pptx
+++ b/assets/fiches/E6-fiche-1h30.pptx
@@ -3722,7 +3722,7 @@
                 </a:solidFill>
                 <a:latin typeface="Arial"/>
               </a:rPr>
-              <a:t>. On l'oublie souvent, mais le numérique est l'un des secteurs les plus émetteurs de gaz à e…</a:t>
+              <a:t>. On l'oublie souvent, mais le numérique est l'un des secteurs les plus émetteurs de gaz à effet de serre au monde. Et sa croissance est rapide.</a:t>
             </a:r>
           </a:p>
         </p:txBody>
@@ -3969,7 +3969,7 @@
                 </a:solidFill>
                 <a:latin typeface="Arial"/>
               </a:rPr>
-              <a:t>. La fabrication de nos appareils numériques est de loin la source d'impact la plus importan…</a:t>
+              <a:t>. La fabrication de nos appareils numériques est de loin la source d'impact la plus importante — bien plus que leur utilisation quotidienne.</a:t>
             </a:r>
           </a:p>
         </p:txBody>
@@ -4463,7 +4463,7 @@
                 </a:solidFill>
                 <a:latin typeface="Arial"/>
               </a:rPr>
-              <a:t>. Ces infrastructures discrètes sont le moteur de notre monde numérique, hébergeant nos donn…</a:t>
+              <a:t>. Ces infrastructures discrètes sont le moteur de notre monde numérique, hébergeant nos données et applications. Cependant, leur fonctionnement est incroyablement gourmand en ressources, notamment pour le refroidissement des serveurs et le maintien d'une température stable.</a:t>
             </a:r>
           </a:p>
         </p:txBody>
@@ -4710,7 +4710,7 @@
                 </a:solidFill>
                 <a:latin typeface="Arial"/>
               </a:rPr>
-              <a:t>. Les Déchets d'Équipements Électriques et Électroniques (DEEE), ou "e-waste", représentent …</a:t>
+              <a:t>. Les Déchets d'Équipements Électriques et Électroniques (DEEE), ou "e-waste", représentent aujourd'hui le flux de déchets qui croît le plus rapidement dans le monde. C'est une problématique environnementale et sanitaire majeure.</a:t>
             </a:r>
           </a:p>
         </p:txBody>
@@ -4957,7 +4957,7 @@
                 </a:solidFill>
                 <a:latin typeface="Arial"/>
               </a:rPr>
-              <a:t>. L'obsolescence, qu'elle soit programmée ou perçue, est un facteur majeur de l'empreinte en…</a:t>
+              <a:t>. L'obsolescence, qu'elle soit programmée ou perçue, est un facteur majeur de l'empreinte environnementale du numérique. Elle nous pousse à renouveler nos appareils bien avant la fin de leur durée de vie potentielle.</a:t>
             </a:r>
           </a:p>
         </p:txBody>
@@ -5204,7 +5204,7 @@
                 </a:solidFill>
                 <a:latin typeface="Arial"/>
               </a:rPr>
-              <a:t>. Plutôt que de céder à l'obsolescence programmée ou perçue, adoptons des gestes simples pou…</a:t>
+              <a:t>. Plutôt que de céder à l'obsolescence programmée ou perçue, adoptons des gestes simples pour prolonger la durée de vie de nos équipements. Chaque année gagnée, c'est une réduction significative de leur empreinte environnementale.</a:t>
             </a:r>
           </a:p>
         </p:txBody>
@@ -5451,7 +5451,7 @@
                 </a:solidFill>
                 <a:latin typeface="Arial"/>
               </a:rPr>
-              <a:t>. Adopter de petits gestes au quotidien peut avoir un impact significatif sur la réduction d…</a:t>
+              <a:t>. Adopter de petits gestes au quotidien peut avoir un impact significatif sur la réduction de votre empreinte numérique. Chaque action compte pour une consommation plus responsable des ressources.</a:t>
             </a:r>
           </a:p>
         </p:txBody>
@@ -5698,7 +5698,7 @@
                 </a:solidFill>
                 <a:latin typeface="Arial"/>
               </a:rPr>
-              <a:t>. L'intelligence artificielle, en particulier l'IA générative, est une technologie révolutio…</a:t>
+              <a:t>. L'intelligence artificielle, en particulier l'IA générative, est une technologie révolutionnaire mais aussi une gourmande insatiable en énergie et en ressources. Son empreinte environnementale croissante est une préoccupation majeure.</a:t>
             </a:r>
           </a:p>
         </p:txBody>
@@ -5971,7 +5971,7 @@
                 </a:solidFill>
                 <a:latin typeface="Arial"/>
               </a:rPr>
-              <a:t>. Face aux enjeux du numérique, des cadres réglementaires et des initiatives collectives éme…</a:t>
+              <a:t>. Face aux enjeux du numérique, des cadres réglementaires et des initiatives collectives émergent pour encourager des pratiques plus durables. Ces efforts visent à transformer en profondeur nos modes de production et de consommation.</a:t>
             </a:r>
           </a:p>
         </p:txBody>
@@ -6218,7 +6218,7 @@
                 </a:solidFill>
                 <a:latin typeface="Arial"/>
               </a:rPr>
-              <a:t>. Répondez à ces questions individuellement ou en petits groupes, puis partagez vos réflexio…</a:t>
+              <a:t>. Répondez à ces questions individuellement ou en petits groupes, puis partagez vos réflexions avec le reste de l'atelier.</a:t>
             </a:r>
           </a:p>
         </p:txBody>
@@ -6474,7 +6474,7 @@
                 </a:solidFill>
                 <a:latin typeface="Arial"/>
               </a:rPr>
-              <a:t>. Derrière chaque écran, chaque circuit imprimé, se cache un monde de minerai…</a:t>
+              <a:t>. Derrière chaque écran, chaque circuit imprimé, se cache un monde de minerais et de métaux rares, dont l'extraction a des conséquences environnementales et sociales souvent dramatiques.</a:t>
             </a:r>
           </a:p>
           <a:p>
@@ -6512,7 +6512,7 @@
                 </a:solidFill>
                 <a:latin typeface="Arial"/>
               </a:rPr>
-              <a:t>. Nos appareils dépendent de ressources comme le lithium (batteries), le coba…</a:t>
+              <a:t>. Nos appareils dépendent de ressources comme le lithium (batteries), le cobalt (batteries, puces), le coltan (condensateurs), l'or, l'argent, le cuivre... L'extraction de ces 70+ métaux est très énergivore et souvent localisée dans des zones politiquement instables.</a:t>
             </a:r>
           </a:p>
         </p:txBody>
@@ -6642,7 +6642,7 @@
                 </a:solidFill>
                 <a:latin typeface="Arial"/>
               </a:rPr>
-              <a:t>. Intégrer le numérique responsable au sein de votre organisation permet de r…</a:t>
+              <a:t>. Intégrer le numérique responsable au sein de votre organisation permet de réduire votre empreinte environnementale tout en optimisant vos coûts et en engageant vos équipes. Voici des pistes concrètes pour agir.</a:t>
             </a:r>
           </a:p>
           <a:p>
@@ -6680,7 +6680,7 @@
                 </a:solidFill>
                 <a:latin typeface="Arial"/>
               </a:rPr>
-              <a:t>. Privilégiez les équipements reconditionnés ou conçus pour durer. Demandez d…</a:t>
+              <a:t>. Privilégiez les équipements reconditionnés ou conçus pour durer. Demandez des garanties de réparabilité et de disponibilité des pièces détachées à vos fournisseurs.</a:t>
             </a:r>
           </a:p>
         </p:txBody>
@@ -6810,7 +6810,7 @@
                 </a:solidFill>
                 <a:latin typeface="Arial"/>
               </a:rPr>
-              <a:t>. Le numérique responsable, c'est l'affaire de tous. Chaque geste compte, cha…</a:t>
+              <a:t>. Le numérique responsable, c'est l'affaire de tous. Chaque geste compte, chaque appareil prolongé, chaque donnée nettoyée contribue à un avenir plus durable.</a:t>
             </a:r>
           </a:p>
           <a:p>
@@ -6829,7 +6829,7 @@
                 </a:solidFill>
                 <a:latin typeface="Arial"/>
               </a:rPr>
-              <a:t>. ADEME-Arcep, Évaluation de l'impact environnemental du numérique en France,…</a:t>
+              <a:t>. ADEME-Arcep, Évaluation de l'impact environnemental du numérique en France, Janvier 2025 — librairie.ademe.fr</a:t>
             </a:r>
           </a:p>
           <a:p>

--- a/assets/fiches/E6-fiche-1h30.pptx
+++ b/assets/fiches/E6-fiche-1h30.pptx
@@ -3097,9 +3097,35 @@
         <p:nvPr/>
       </p:nvGrpSpPr>
       <p:grpSpPr/>
-      <p:sp>
-        <p:nvSpPr>
-          <p:cNvPr id="2" name="TextBox 1"/>
+      <p:pic>
+        <p:nvPicPr>
+          <p:cNvPr id="2" name="Picture 1" descr="bg-p1.png"/>
+          <p:cNvPicPr>
+            <a:picLocks noChangeAspect="1"/>
+          </p:cNvPicPr>
+          <p:nvPr/>
+        </p:nvPicPr>
+        <p:blipFill>
+          <a:blip r:embed="rId2">
+            <a:alphaModFix amt="80000"/>
+          </a:blip>
+          <a:stretch>
+            <a:fillRect/>
+          </a:stretch>
+        </p:blipFill>
+        <p:spPr>
+          <a:xfrm>
+            <a:off x="0" y="0"/>
+            <a:ext cx="7556399" cy="10692000"/>
+          </a:xfrm>
+          <a:prstGeom prst="rect">
+            <a:avLst/>
+          </a:prstGeom>
+        </p:spPr>
+      </p:pic>
+      <p:sp>
+        <p:nvSpPr>
+          <p:cNvPr id="3" name="TextBox 2"/>
           <p:cNvSpPr txBox="1"/>
           <p:nvPr/>
         </p:nvSpPr>
@@ -3160,7 +3186,7 @@
       </p:sp>
       <p:sp>
         <p:nvSpPr>
-          <p:cNvPr id="3" name="Rectangle 2"/>
+          <p:cNvPr id="4" name="Rectangle 3"/>
           <p:cNvSpPr/>
           <p:nvPr/>
         </p:nvSpPr>
@@ -3203,7 +3229,7 @@
       </p:sp>
       <p:sp>
         <p:nvSpPr>
-          <p:cNvPr id="4" name="TextBox 3"/>
+          <p:cNvPr id="5" name="TextBox 4"/>
           <p:cNvSpPr txBox="1"/>
           <p:nvPr/>
         </p:nvSpPr>
@@ -3321,7 +3347,7 @@
       </p:sp>
       <p:sp>
         <p:nvSpPr>
-          <p:cNvPr id="5" name="Rectangle 4"/>
+          <p:cNvPr id="6" name="Rectangle 5"/>
           <p:cNvSpPr/>
           <p:nvPr/>
         </p:nvSpPr>
@@ -3364,7 +3390,7 @@
       </p:sp>
       <p:sp>
         <p:nvSpPr>
-          <p:cNvPr id="6" name="TextBox 5"/>
+          <p:cNvPr id="7" name="TextBox 6"/>
           <p:cNvSpPr txBox="1"/>
           <p:nvPr/>
         </p:nvSpPr>
@@ -3482,7 +3508,7 @@
       </p:sp>
       <p:sp>
         <p:nvSpPr>
-          <p:cNvPr id="7" name="Rectangle 6"/>
+          <p:cNvPr id="8" name="Rectangle 7"/>
           <p:cNvSpPr/>
           <p:nvPr/>
         </p:nvSpPr>
@@ -3525,7 +3551,7 @@
       </p:sp>
       <p:sp>
         <p:nvSpPr>
-          <p:cNvPr id="8" name="Rectangle 7"/>
+          <p:cNvPr id="9" name="Rectangle 8"/>
           <p:cNvSpPr/>
           <p:nvPr/>
         </p:nvSpPr>
@@ -3566,7 +3592,7 @@
       </p:sp>
       <p:sp>
         <p:nvSpPr>
-          <p:cNvPr id="9" name="Rectangle 8"/>
+          <p:cNvPr id="10" name="Rectangle 9"/>
           <p:cNvSpPr/>
           <p:nvPr/>
         </p:nvSpPr>
@@ -3607,7 +3633,7 @@
       </p:sp>
       <p:sp>
         <p:nvSpPr>
-          <p:cNvPr id="10" name="TextBox 9"/>
+          <p:cNvPr id="11" name="TextBox 10"/>
           <p:cNvSpPr txBox="1"/>
           <p:nvPr/>
         </p:nvSpPr>
@@ -3649,7 +3675,7 @@
       </p:sp>
       <p:sp>
         <p:nvSpPr>
-          <p:cNvPr id="11" name="TextBox 10"/>
+          <p:cNvPr id="12" name="TextBox 11"/>
           <p:cNvSpPr txBox="1"/>
           <p:nvPr/>
         </p:nvSpPr>
@@ -3729,7 +3755,7 @@
       </p:sp>
       <p:sp>
         <p:nvSpPr>
-          <p:cNvPr id="12" name="Rectangle 11"/>
+          <p:cNvPr id="13" name="Rectangle 12"/>
           <p:cNvSpPr/>
           <p:nvPr/>
         </p:nvSpPr>
@@ -3772,7 +3798,7 @@
       </p:sp>
       <p:sp>
         <p:nvSpPr>
-          <p:cNvPr id="13" name="Rectangle 12"/>
+          <p:cNvPr id="14" name="Rectangle 13"/>
           <p:cNvSpPr/>
           <p:nvPr/>
         </p:nvSpPr>
@@ -3813,7 +3839,7 @@
       </p:sp>
       <p:sp>
         <p:nvSpPr>
-          <p:cNvPr id="14" name="Rectangle 13"/>
+          <p:cNvPr id="15" name="Rectangle 14"/>
           <p:cNvSpPr/>
           <p:nvPr/>
         </p:nvSpPr>
@@ -3854,7 +3880,7 @@
       </p:sp>
       <p:sp>
         <p:nvSpPr>
-          <p:cNvPr id="15" name="TextBox 14"/>
+          <p:cNvPr id="16" name="TextBox 15"/>
           <p:cNvSpPr txBox="1"/>
           <p:nvPr/>
         </p:nvSpPr>
@@ -3896,7 +3922,7 @@
       </p:sp>
       <p:sp>
         <p:nvSpPr>
-          <p:cNvPr id="16" name="TextBox 15"/>
+          <p:cNvPr id="17" name="TextBox 16"/>
           <p:cNvSpPr txBox="1"/>
           <p:nvPr/>
         </p:nvSpPr>
@@ -3976,7 +4002,7 @@
       </p:sp>
       <p:sp>
         <p:nvSpPr>
-          <p:cNvPr id="17" name="Rectangle 16"/>
+          <p:cNvPr id="18" name="Rectangle 17"/>
           <p:cNvSpPr/>
           <p:nvPr/>
         </p:nvSpPr>
@@ -4019,7 +4045,7 @@
       </p:sp>
       <p:sp>
         <p:nvSpPr>
-          <p:cNvPr id="18" name="Rectangle 17"/>
+          <p:cNvPr id="19" name="Rectangle 18"/>
           <p:cNvSpPr/>
           <p:nvPr/>
         </p:nvSpPr>
@@ -4060,7 +4086,7 @@
       </p:sp>
       <p:sp>
         <p:nvSpPr>
-          <p:cNvPr id="19" name="Rectangle 18"/>
+          <p:cNvPr id="20" name="Rectangle 19"/>
           <p:cNvSpPr/>
           <p:nvPr/>
         </p:nvSpPr>
@@ -4101,7 +4127,7 @@
       </p:sp>
       <p:sp>
         <p:nvSpPr>
-          <p:cNvPr id="20" name="TextBox 19"/>
+          <p:cNvPr id="21" name="TextBox 20"/>
           <p:cNvSpPr txBox="1"/>
           <p:nvPr/>
         </p:nvSpPr>
@@ -4143,7 +4169,7 @@
       </p:sp>
       <p:sp>
         <p:nvSpPr>
-          <p:cNvPr id="21" name="TextBox 20"/>
+          <p:cNvPr id="22" name="TextBox 21"/>
           <p:cNvSpPr txBox="1"/>
           <p:nvPr/>
         </p:nvSpPr>
@@ -4223,7 +4249,7 @@
       </p:sp>
       <p:sp>
         <p:nvSpPr>
-          <p:cNvPr id="22" name="Rectangle 21"/>
+          <p:cNvPr id="23" name="Rectangle 22"/>
           <p:cNvSpPr/>
           <p:nvPr/>
         </p:nvSpPr>
@@ -4266,7 +4292,7 @@
       </p:sp>
       <p:sp>
         <p:nvSpPr>
-          <p:cNvPr id="23" name="Rectangle 22"/>
+          <p:cNvPr id="24" name="Rectangle 23"/>
           <p:cNvSpPr/>
           <p:nvPr/>
         </p:nvSpPr>
@@ -4307,7 +4333,7 @@
       </p:sp>
       <p:sp>
         <p:nvSpPr>
-          <p:cNvPr id="24" name="Rectangle 23"/>
+          <p:cNvPr id="25" name="Rectangle 24"/>
           <p:cNvSpPr/>
           <p:nvPr/>
         </p:nvSpPr>
@@ -4348,7 +4374,7 @@
       </p:sp>
       <p:sp>
         <p:nvSpPr>
-          <p:cNvPr id="25" name="TextBox 24"/>
+          <p:cNvPr id="26" name="TextBox 25"/>
           <p:cNvSpPr txBox="1"/>
           <p:nvPr/>
         </p:nvSpPr>
@@ -4390,7 +4416,7 @@
       </p:sp>
       <p:sp>
         <p:nvSpPr>
-          <p:cNvPr id="26" name="TextBox 25"/>
+          <p:cNvPr id="27" name="TextBox 26"/>
           <p:cNvSpPr txBox="1"/>
           <p:nvPr/>
         </p:nvSpPr>
@@ -4470,7 +4496,7 @@
       </p:sp>
       <p:sp>
         <p:nvSpPr>
-          <p:cNvPr id="27" name="Rectangle 26"/>
+          <p:cNvPr id="28" name="Rectangle 27"/>
           <p:cNvSpPr/>
           <p:nvPr/>
         </p:nvSpPr>
@@ -4513,7 +4539,7 @@
       </p:sp>
       <p:sp>
         <p:nvSpPr>
-          <p:cNvPr id="28" name="Rectangle 27"/>
+          <p:cNvPr id="29" name="Rectangle 28"/>
           <p:cNvSpPr/>
           <p:nvPr/>
         </p:nvSpPr>
@@ -4554,7 +4580,7 @@
       </p:sp>
       <p:sp>
         <p:nvSpPr>
-          <p:cNvPr id="29" name="Rectangle 28"/>
+          <p:cNvPr id="30" name="Rectangle 29"/>
           <p:cNvSpPr/>
           <p:nvPr/>
         </p:nvSpPr>
@@ -4595,7 +4621,7 @@
       </p:sp>
       <p:sp>
         <p:nvSpPr>
-          <p:cNvPr id="30" name="TextBox 29"/>
+          <p:cNvPr id="31" name="TextBox 30"/>
           <p:cNvSpPr txBox="1"/>
           <p:nvPr/>
         </p:nvSpPr>
@@ -4637,7 +4663,7 @@
       </p:sp>
       <p:sp>
         <p:nvSpPr>
-          <p:cNvPr id="31" name="TextBox 30"/>
+          <p:cNvPr id="32" name="TextBox 31"/>
           <p:cNvSpPr txBox="1"/>
           <p:nvPr/>
         </p:nvSpPr>
@@ -4717,7 +4743,7 @@
       </p:sp>
       <p:sp>
         <p:nvSpPr>
-          <p:cNvPr id="32" name="Rectangle 31"/>
+          <p:cNvPr id="33" name="Rectangle 32"/>
           <p:cNvSpPr/>
           <p:nvPr/>
         </p:nvSpPr>
@@ -4760,7 +4786,7 @@
       </p:sp>
       <p:sp>
         <p:nvSpPr>
-          <p:cNvPr id="33" name="Rectangle 32"/>
+          <p:cNvPr id="34" name="Rectangle 33"/>
           <p:cNvSpPr/>
           <p:nvPr/>
         </p:nvSpPr>
@@ -4801,7 +4827,7 @@
       </p:sp>
       <p:sp>
         <p:nvSpPr>
-          <p:cNvPr id="34" name="Rectangle 33"/>
+          <p:cNvPr id="35" name="Rectangle 34"/>
           <p:cNvSpPr/>
           <p:nvPr/>
         </p:nvSpPr>
@@ -4842,7 +4868,7 @@
       </p:sp>
       <p:sp>
         <p:nvSpPr>
-          <p:cNvPr id="35" name="TextBox 34"/>
+          <p:cNvPr id="36" name="TextBox 35"/>
           <p:cNvSpPr txBox="1"/>
           <p:nvPr/>
         </p:nvSpPr>
@@ -4884,7 +4910,7 @@
       </p:sp>
       <p:sp>
         <p:nvSpPr>
-          <p:cNvPr id="36" name="TextBox 35"/>
+          <p:cNvPr id="37" name="TextBox 36"/>
           <p:cNvSpPr txBox="1"/>
           <p:nvPr/>
         </p:nvSpPr>
@@ -4964,7 +4990,7 @@
       </p:sp>
       <p:sp>
         <p:nvSpPr>
-          <p:cNvPr id="37" name="Rectangle 36"/>
+          <p:cNvPr id="38" name="Rectangle 37"/>
           <p:cNvSpPr/>
           <p:nvPr/>
         </p:nvSpPr>
@@ -5007,7 +5033,7 @@
       </p:sp>
       <p:sp>
         <p:nvSpPr>
-          <p:cNvPr id="38" name="Rectangle 37"/>
+          <p:cNvPr id="39" name="Rectangle 38"/>
           <p:cNvSpPr/>
           <p:nvPr/>
         </p:nvSpPr>
@@ -5048,7 +5074,7 @@
       </p:sp>
       <p:sp>
         <p:nvSpPr>
-          <p:cNvPr id="39" name="Rectangle 38"/>
+          <p:cNvPr id="40" name="Rectangle 39"/>
           <p:cNvSpPr/>
           <p:nvPr/>
         </p:nvSpPr>
@@ -5089,7 +5115,7 @@
       </p:sp>
       <p:sp>
         <p:nvSpPr>
-          <p:cNvPr id="40" name="TextBox 39"/>
+          <p:cNvPr id="41" name="TextBox 40"/>
           <p:cNvSpPr txBox="1"/>
           <p:nvPr/>
         </p:nvSpPr>
@@ -5131,7 +5157,7 @@
       </p:sp>
       <p:sp>
         <p:nvSpPr>
-          <p:cNvPr id="41" name="TextBox 40"/>
+          <p:cNvPr id="42" name="TextBox 41"/>
           <p:cNvSpPr txBox="1"/>
           <p:nvPr/>
         </p:nvSpPr>
@@ -5211,7 +5237,7 @@
       </p:sp>
       <p:sp>
         <p:nvSpPr>
-          <p:cNvPr id="42" name="Rectangle 41"/>
+          <p:cNvPr id="43" name="Rectangle 42"/>
           <p:cNvSpPr/>
           <p:nvPr/>
         </p:nvSpPr>
@@ -5254,7 +5280,7 @@
       </p:sp>
       <p:sp>
         <p:nvSpPr>
-          <p:cNvPr id="43" name="Rectangle 42"/>
+          <p:cNvPr id="44" name="Rectangle 43"/>
           <p:cNvSpPr/>
           <p:nvPr/>
         </p:nvSpPr>
@@ -5295,7 +5321,7 @@
       </p:sp>
       <p:sp>
         <p:nvSpPr>
-          <p:cNvPr id="44" name="Rectangle 43"/>
+          <p:cNvPr id="45" name="Rectangle 44"/>
           <p:cNvSpPr/>
           <p:nvPr/>
         </p:nvSpPr>
@@ -5336,7 +5362,7 @@
       </p:sp>
       <p:sp>
         <p:nvSpPr>
-          <p:cNvPr id="45" name="TextBox 44"/>
+          <p:cNvPr id="46" name="TextBox 45"/>
           <p:cNvSpPr txBox="1"/>
           <p:nvPr/>
         </p:nvSpPr>
@@ -5378,7 +5404,7 @@
       </p:sp>
       <p:sp>
         <p:nvSpPr>
-          <p:cNvPr id="46" name="TextBox 45"/>
+          <p:cNvPr id="47" name="TextBox 46"/>
           <p:cNvSpPr txBox="1"/>
           <p:nvPr/>
         </p:nvSpPr>
@@ -5458,7 +5484,7 @@
       </p:sp>
       <p:sp>
         <p:nvSpPr>
-          <p:cNvPr id="47" name="Rectangle 46"/>
+          <p:cNvPr id="48" name="Rectangle 47"/>
           <p:cNvSpPr/>
           <p:nvPr/>
         </p:nvSpPr>
@@ -5501,7 +5527,7 @@
       </p:sp>
       <p:sp>
         <p:nvSpPr>
-          <p:cNvPr id="48" name="Rectangle 47"/>
+          <p:cNvPr id="49" name="Rectangle 48"/>
           <p:cNvSpPr/>
           <p:nvPr/>
         </p:nvSpPr>
@@ -5542,7 +5568,7 @@
       </p:sp>
       <p:sp>
         <p:nvSpPr>
-          <p:cNvPr id="49" name="Rectangle 48"/>
+          <p:cNvPr id="50" name="Rectangle 49"/>
           <p:cNvSpPr/>
           <p:nvPr/>
         </p:nvSpPr>
@@ -5583,7 +5609,7 @@
       </p:sp>
       <p:sp>
         <p:nvSpPr>
-          <p:cNvPr id="50" name="TextBox 49"/>
+          <p:cNvPr id="51" name="TextBox 50"/>
           <p:cNvSpPr txBox="1"/>
           <p:nvPr/>
         </p:nvSpPr>
@@ -5625,7 +5651,7 @@
       </p:sp>
       <p:sp>
         <p:nvSpPr>
-          <p:cNvPr id="51" name="TextBox 50"/>
+          <p:cNvPr id="52" name="TextBox 51"/>
           <p:cNvSpPr txBox="1"/>
           <p:nvPr/>
         </p:nvSpPr>
@@ -5729,9 +5755,35 @@
         <p:nvPr/>
       </p:nvGrpSpPr>
       <p:grpSpPr/>
-      <p:sp>
-        <p:nvSpPr>
-          <p:cNvPr id="2" name="Rectangle 1"/>
+      <p:pic>
+        <p:nvPicPr>
+          <p:cNvPr id="2" name="Picture 1" descr="bg-p2.png"/>
+          <p:cNvPicPr>
+            <a:picLocks noChangeAspect="1"/>
+          </p:cNvPicPr>
+          <p:nvPr/>
+        </p:nvPicPr>
+        <p:blipFill>
+          <a:blip r:embed="rId2">
+            <a:alphaModFix amt="80000"/>
+          </a:blip>
+          <a:stretch>
+            <a:fillRect/>
+          </a:stretch>
+        </p:blipFill>
+        <p:spPr>
+          <a:xfrm>
+            <a:off x="0" y="0"/>
+            <a:ext cx="7556399" cy="10692000"/>
+          </a:xfrm>
+          <a:prstGeom prst="rect">
+            <a:avLst/>
+          </a:prstGeom>
+        </p:spPr>
+      </p:pic>
+      <p:sp>
+        <p:nvSpPr>
+          <p:cNvPr id="3" name="Rectangle 2"/>
           <p:cNvSpPr/>
           <p:nvPr/>
         </p:nvSpPr>
@@ -5774,7 +5826,7 @@
       </p:sp>
       <p:sp>
         <p:nvSpPr>
-          <p:cNvPr id="3" name="Rectangle 2"/>
+          <p:cNvPr id="4" name="Rectangle 3"/>
           <p:cNvSpPr/>
           <p:nvPr/>
         </p:nvSpPr>
@@ -5815,7 +5867,7 @@
       </p:sp>
       <p:sp>
         <p:nvSpPr>
-          <p:cNvPr id="4" name="Rectangle 3"/>
+          <p:cNvPr id="5" name="Rectangle 4"/>
           <p:cNvSpPr/>
           <p:nvPr/>
         </p:nvSpPr>
@@ -5856,7 +5908,7 @@
       </p:sp>
       <p:sp>
         <p:nvSpPr>
-          <p:cNvPr id="5" name="TextBox 4"/>
+          <p:cNvPr id="6" name="TextBox 5"/>
           <p:cNvSpPr txBox="1"/>
           <p:nvPr/>
         </p:nvSpPr>
@@ -5898,7 +5950,7 @@
       </p:sp>
       <p:sp>
         <p:nvSpPr>
-          <p:cNvPr id="6" name="TextBox 5"/>
+          <p:cNvPr id="7" name="TextBox 6"/>
           <p:cNvSpPr txBox="1"/>
           <p:nvPr/>
         </p:nvSpPr>
@@ -5978,7 +6030,7 @@
       </p:sp>
       <p:sp>
         <p:nvSpPr>
-          <p:cNvPr id="7" name="Rectangle 6"/>
+          <p:cNvPr id="8" name="Rectangle 7"/>
           <p:cNvSpPr/>
           <p:nvPr/>
         </p:nvSpPr>
@@ -6021,7 +6073,7 @@
       </p:sp>
       <p:sp>
         <p:nvSpPr>
-          <p:cNvPr id="8" name="Rectangle 7"/>
+          <p:cNvPr id="9" name="Rectangle 8"/>
           <p:cNvSpPr/>
           <p:nvPr/>
         </p:nvSpPr>
@@ -6062,7 +6114,7 @@
       </p:sp>
       <p:sp>
         <p:nvSpPr>
-          <p:cNvPr id="9" name="Rectangle 8"/>
+          <p:cNvPr id="10" name="Rectangle 9"/>
           <p:cNvSpPr/>
           <p:nvPr/>
         </p:nvSpPr>
@@ -6103,7 +6155,7 @@
       </p:sp>
       <p:sp>
         <p:nvSpPr>
-          <p:cNvPr id="10" name="TextBox 9"/>
+          <p:cNvPr id="11" name="TextBox 10"/>
           <p:cNvSpPr txBox="1"/>
           <p:nvPr/>
         </p:nvSpPr>
@@ -6145,7 +6197,7 @@
       </p:sp>
       <p:sp>
         <p:nvSpPr>
-          <p:cNvPr id="11" name="TextBox 10"/>
+          <p:cNvPr id="12" name="TextBox 11"/>
           <p:cNvSpPr txBox="1"/>
           <p:nvPr/>
         </p:nvSpPr>
@@ -6225,7 +6277,7 @@
       </p:sp>
       <p:sp>
         <p:nvSpPr>
-          <p:cNvPr id="12" name="Rectangle 11"/>
+          <p:cNvPr id="13" name="Rectangle 12"/>
           <p:cNvSpPr/>
           <p:nvPr/>
         </p:nvSpPr>
@@ -6268,7 +6320,7 @@
       </p:sp>
       <p:sp>
         <p:nvSpPr>
-          <p:cNvPr id="13" name="Rectangle 12"/>
+          <p:cNvPr id="14" name="Rectangle 13"/>
           <p:cNvSpPr/>
           <p:nvPr/>
         </p:nvSpPr>
@@ -6309,7 +6361,7 @@
       </p:sp>
       <p:sp>
         <p:nvSpPr>
-          <p:cNvPr id="14" name="TextBox 13"/>
+          <p:cNvPr id="15" name="TextBox 14"/>
           <p:cNvSpPr txBox="1"/>
           <p:nvPr/>
         </p:nvSpPr>
@@ -6351,7 +6403,7 @@
       </p:sp>
       <p:sp>
         <p:nvSpPr>
-          <p:cNvPr id="15" name="Rectangle 14"/>
+          <p:cNvPr id="16" name="Rectangle 15"/>
           <p:cNvSpPr/>
           <p:nvPr/>
         </p:nvSpPr>
@@ -6392,7 +6444,7 @@
       </p:sp>
       <p:sp>
         <p:nvSpPr>
-          <p:cNvPr id="16" name="TextBox 15"/>
+          <p:cNvPr id="17" name="TextBox 16"/>
           <p:cNvSpPr txBox="1"/>
           <p:nvPr/>
         </p:nvSpPr>
@@ -6519,7 +6571,7 @@
       </p:sp>
       <p:sp>
         <p:nvSpPr>
-          <p:cNvPr id="17" name="Rectangle 16"/>
+          <p:cNvPr id="18" name="Rectangle 17"/>
           <p:cNvSpPr/>
           <p:nvPr/>
         </p:nvSpPr>
@@ -6560,7 +6612,7 @@
       </p:sp>
       <p:sp>
         <p:nvSpPr>
-          <p:cNvPr id="18" name="TextBox 17"/>
+          <p:cNvPr id="19" name="TextBox 18"/>
           <p:cNvSpPr txBox="1"/>
           <p:nvPr/>
         </p:nvSpPr>
@@ -6687,7 +6739,7 @@
       </p:sp>
       <p:sp>
         <p:nvSpPr>
-          <p:cNvPr id="19" name="Rectangle 18"/>
+          <p:cNvPr id="20" name="Rectangle 19"/>
           <p:cNvSpPr/>
           <p:nvPr/>
         </p:nvSpPr>
@@ -6728,7 +6780,7 @@
       </p:sp>
       <p:sp>
         <p:nvSpPr>
-          <p:cNvPr id="20" name="TextBox 19"/>
+          <p:cNvPr id="21" name="TextBox 20"/>
           <p:cNvSpPr txBox="1"/>
           <p:nvPr/>
         </p:nvSpPr>
@@ -6855,7 +6907,7 @@
       </p:sp>
       <p:sp>
         <p:nvSpPr>
-          <p:cNvPr id="21" name="Rectangle 20"/>
+          <p:cNvPr id="22" name="Rectangle 21"/>
           <p:cNvSpPr/>
           <p:nvPr/>
         </p:nvSpPr>
@@ -6896,7 +6948,7 @@
       </p:sp>
       <p:sp>
         <p:nvSpPr>
-          <p:cNvPr id="22" name="TextBox 21"/>
+          <p:cNvPr id="23" name="TextBox 22"/>
           <p:cNvSpPr txBox="1"/>
           <p:nvPr/>
         </p:nvSpPr>

--- a/assets/fiches/E6-fiche-1h30.pptx
+++ b/assets/fiches/E6-fiche-1h30.pptx
@@ -3084,9 +3084,12 @@
   <p:cSld>
     <p:bg>
       <p:bgPr>
-        <a:solidFill>
-          <a:srgbClr val="FFFFFF"/>
-        </a:solidFill>
+        <a:blipFill>
+          <a:blip r:embed="rId2"/>
+          <a:stretch>
+            <a:fillRect/>
+          </a:stretch>
+        </a:blipFill>
         <a:effectLst/>
       </p:bgPr>
     </p:bg>
@@ -3097,35 +3100,9 @@
         <p:nvPr/>
       </p:nvGrpSpPr>
       <p:grpSpPr/>
-      <p:pic>
-        <p:nvPicPr>
-          <p:cNvPr id="2" name="Picture 1" descr="bg-p1.png"/>
-          <p:cNvPicPr>
-            <a:picLocks noChangeAspect="1"/>
-          </p:cNvPicPr>
-          <p:nvPr/>
-        </p:nvPicPr>
-        <p:blipFill>
-          <a:blip r:embed="rId2">
-            <a:alphaModFix amt="80000"/>
-          </a:blip>
-          <a:stretch>
-            <a:fillRect/>
-          </a:stretch>
-        </p:blipFill>
-        <p:spPr>
-          <a:xfrm>
-            <a:off x="0" y="0"/>
-            <a:ext cx="7556399" cy="10692000"/>
-          </a:xfrm>
-          <a:prstGeom prst="rect">
-            <a:avLst/>
-          </a:prstGeom>
-        </p:spPr>
-      </p:pic>
-      <p:sp>
-        <p:nvSpPr>
-          <p:cNvPr id="3" name="TextBox 2"/>
+      <p:sp>
+        <p:nvSpPr>
+          <p:cNvPr id="2" name="TextBox 1"/>
           <p:cNvSpPr txBox="1"/>
           <p:nvPr/>
         </p:nvSpPr>
@@ -3186,7 +3163,7 @@
       </p:sp>
       <p:sp>
         <p:nvSpPr>
-          <p:cNvPr id="4" name="Rectangle 3"/>
+          <p:cNvPr id="3" name="Rectangle 2"/>
           <p:cNvSpPr/>
           <p:nvPr/>
         </p:nvSpPr>
@@ -3229,7 +3206,7 @@
       </p:sp>
       <p:sp>
         <p:nvSpPr>
-          <p:cNvPr id="5" name="TextBox 4"/>
+          <p:cNvPr id="4" name="TextBox 3"/>
           <p:cNvSpPr txBox="1"/>
           <p:nvPr/>
         </p:nvSpPr>
@@ -3347,7 +3324,7 @@
       </p:sp>
       <p:sp>
         <p:nvSpPr>
-          <p:cNvPr id="6" name="Rectangle 5"/>
+          <p:cNvPr id="5" name="Rectangle 4"/>
           <p:cNvSpPr/>
           <p:nvPr/>
         </p:nvSpPr>
@@ -3390,7 +3367,7 @@
       </p:sp>
       <p:sp>
         <p:nvSpPr>
-          <p:cNvPr id="7" name="TextBox 6"/>
+          <p:cNvPr id="6" name="TextBox 5"/>
           <p:cNvSpPr txBox="1"/>
           <p:nvPr/>
         </p:nvSpPr>
@@ -3508,7 +3485,7 @@
       </p:sp>
       <p:sp>
         <p:nvSpPr>
-          <p:cNvPr id="8" name="Rectangle 7"/>
+          <p:cNvPr id="7" name="Rectangle 6"/>
           <p:cNvSpPr/>
           <p:nvPr/>
         </p:nvSpPr>
@@ -3551,7 +3528,7 @@
       </p:sp>
       <p:sp>
         <p:nvSpPr>
-          <p:cNvPr id="9" name="Rectangle 8"/>
+          <p:cNvPr id="8" name="Rectangle 7"/>
           <p:cNvSpPr/>
           <p:nvPr/>
         </p:nvSpPr>
@@ -3592,7 +3569,7 @@
       </p:sp>
       <p:sp>
         <p:nvSpPr>
-          <p:cNvPr id="10" name="Rectangle 9"/>
+          <p:cNvPr id="9" name="Rectangle 8"/>
           <p:cNvSpPr/>
           <p:nvPr/>
         </p:nvSpPr>
@@ -3633,14 +3610,56 @@
       </p:sp>
       <p:sp>
         <p:nvSpPr>
+          <p:cNvPr id="10" name="TextBox 9"/>
+          <p:cNvSpPr txBox="1"/>
+          <p:nvPr/>
+        </p:nvSpPr>
+        <p:spPr>
+          <a:xfrm>
+            <a:off x="763200" y="3031200"/>
+            <a:ext cx="468000" cy="158400"/>
+          </a:xfrm>
+          <a:prstGeom prst="rect">
+            <a:avLst/>
+          </a:prstGeom>
+          <a:noFill/>
+        </p:spPr>
+        <p:txBody>
+          <a:bodyPr wrap="square" tIns="0" bIns="0" lIns="18000" rIns="18000">
+            <a:spAutoFit/>
+          </a:bodyPr>
+          <a:lstStyle/>
+          <a:p>
+            <a:pPr algn="ctr">
+              <a:spcBef>
+                <a:spcPts val="0"/>
+              </a:spcBef>
+              <a:spcAft>
+                <a:spcPts val="100"/>
+              </a:spcAft>
+            </a:pPr>
+            <a:r>
+              <a:rPr sz="800" b="1" i="0">
+                <a:solidFill>
+                  <a:srgbClr val="FFFFFF"/>
+                </a:solidFill>
+                <a:latin typeface="Arial"/>
+              </a:rPr>
+              <a:t>0:02</a:t>
+            </a:r>
+          </a:p>
+        </p:txBody>
+      </p:sp>
+      <p:sp>
+        <p:nvSpPr>
           <p:cNvPr id="11" name="TextBox 10"/>
           <p:cNvSpPr txBox="1"/>
           <p:nvPr/>
         </p:nvSpPr>
         <p:spPr>
           <a:xfrm>
-            <a:off x="763200" y="3031200"/>
-            <a:ext cx="468000" cy="158400"/>
+            <a:off x="1303200" y="2800800"/>
+            <a:ext cx="5652000" cy="655200"/>
           </a:xfrm>
           <a:prstGeom prst="rect">
             <a:avLst/>
@@ -3653,7 +3672,7 @@
           </a:bodyPr>
           <a:lstStyle/>
           <a:p>
-            <a:pPr algn="ctr">
+            <a:pPr algn="l">
               <a:spcBef>
                 <a:spcPts val="0"/>
               </a:spcBef>
@@ -3664,36 +3683,13 @@
             <a:r>
               <a:rPr sz="800" b="1" i="0">
                 <a:solidFill>
-                  <a:srgbClr val="FFFFFF"/>
-                </a:solidFill>
-                <a:latin typeface="Arial"/>
-              </a:rPr>
-              <a:t>0:02</a:t>
-            </a:r>
-          </a:p>
-        </p:txBody>
-      </p:sp>
-      <p:sp>
-        <p:nvSpPr>
-          <p:cNvPr id="12" name="TextBox 11"/>
-          <p:cNvSpPr txBox="1"/>
-          <p:nvPr/>
-        </p:nvSpPr>
-        <p:spPr>
-          <a:xfrm>
-            <a:off x="1303200" y="2800800"/>
-            <a:ext cx="5652000" cy="655200"/>
-          </a:xfrm>
-          <a:prstGeom prst="rect">
-            <a:avLst/>
-          </a:prstGeom>
-          <a:noFill/>
-        </p:spPr>
-        <p:txBody>
-          <a:bodyPr wrap="square" tIns="0" bIns="0" lIns="18000" rIns="18000">
-            <a:spAutoFit/>
-          </a:bodyPr>
-          <a:lstStyle/>
+                  <a:srgbClr val="5EB3D2"/>
+                </a:solidFill>
+                <a:latin typeface="Arial"/>
+              </a:rPr>
+              <a:t>8 min</a:t>
+            </a:r>
+          </a:p>
           <a:p>
             <a:pPr algn="l">
               <a:spcBef>
@@ -3704,13 +3700,13 @@
               </a:spcAft>
             </a:pPr>
             <a:r>
-              <a:rPr sz="800" b="1" i="0">
-                <a:solidFill>
-                  <a:srgbClr val="5EB3D2"/>
-                </a:solidFill>
-                <a:latin typeface="Arial"/>
-              </a:rPr>
-              <a:t>8 min</a:t>
+              <a:rPr sz="900" b="1" i="0">
+                <a:solidFill>
+                  <a:srgbClr val="2B2B2B"/>
+                </a:solidFill>
+                <a:latin typeface="Arial"/>
+              </a:rPr>
+              <a:t>Le numérique : un secteur qui pèse lourd</a:t>
             </a:r>
           </a:p>
           <a:p>
@@ -3723,31 +3719,12 @@
               </a:spcAft>
             </a:pPr>
             <a:r>
-              <a:rPr sz="900" b="1" i="0">
+              <a:rPr sz="800" b="0" i="0">
                 <a:solidFill>
                   <a:srgbClr val="2B2B2B"/>
                 </a:solidFill>
                 <a:latin typeface="Arial"/>
               </a:rPr>
-              <a:t>Le numérique : un secteur qui pèse lourd</a:t>
-            </a:r>
-          </a:p>
-          <a:p>
-            <a:pPr algn="l">
-              <a:spcBef>
-                <a:spcPts val="0"/>
-              </a:spcBef>
-              <a:spcAft>
-                <a:spcPts val="100"/>
-              </a:spcAft>
-            </a:pPr>
-            <a:r>
-              <a:rPr sz="800" b="0" i="0">
-                <a:solidFill>
-                  <a:srgbClr val="2B2B2B"/>
-                </a:solidFill>
-                <a:latin typeface="Arial"/>
-              </a:rPr>
               <a:t>. On l'oublie souvent, mais le numérique est l'un des secteurs les plus émetteurs de gaz à effet de serre au monde. Et sa croissance est rapide.</a:t>
             </a:r>
           </a:p>
@@ -3755,7 +3732,7 @@
       </p:sp>
       <p:sp>
         <p:nvSpPr>
-          <p:cNvPr id="13" name="Rectangle 12"/>
+          <p:cNvPr id="12" name="Rectangle 11"/>
           <p:cNvSpPr/>
           <p:nvPr/>
         </p:nvSpPr>
@@ -3798,7 +3775,7 @@
       </p:sp>
       <p:sp>
         <p:nvSpPr>
-          <p:cNvPr id="14" name="Rectangle 13"/>
+          <p:cNvPr id="13" name="Rectangle 12"/>
           <p:cNvSpPr/>
           <p:nvPr/>
         </p:nvSpPr>
@@ -3839,7 +3816,7 @@
       </p:sp>
       <p:sp>
         <p:nvSpPr>
-          <p:cNvPr id="15" name="Rectangle 14"/>
+          <p:cNvPr id="14" name="Rectangle 13"/>
           <p:cNvSpPr/>
           <p:nvPr/>
         </p:nvSpPr>
@@ -3880,14 +3857,56 @@
       </p:sp>
       <p:sp>
         <p:nvSpPr>
+          <p:cNvPr id="15" name="TextBox 14"/>
+          <p:cNvSpPr txBox="1"/>
+          <p:nvPr/>
+        </p:nvSpPr>
+        <p:spPr>
+          <a:xfrm>
+            <a:off x="763200" y="3780000"/>
+            <a:ext cx="468000" cy="158400"/>
+          </a:xfrm>
+          <a:prstGeom prst="rect">
+            <a:avLst/>
+          </a:prstGeom>
+          <a:noFill/>
+        </p:spPr>
+        <p:txBody>
+          <a:bodyPr wrap="square" tIns="0" bIns="0" lIns="18000" rIns="18000">
+            <a:spAutoFit/>
+          </a:bodyPr>
+          <a:lstStyle/>
+          <a:p>
+            <a:pPr algn="ctr">
+              <a:spcBef>
+                <a:spcPts val="0"/>
+              </a:spcBef>
+              <a:spcAft>
+                <a:spcPts val="100"/>
+              </a:spcAft>
+            </a:pPr>
+            <a:r>
+              <a:rPr sz="800" b="1" i="0">
+                <a:solidFill>
+                  <a:srgbClr val="FFFFFF"/>
+                </a:solidFill>
+                <a:latin typeface="Arial"/>
+              </a:rPr>
+              <a:t>0:10</a:t>
+            </a:r>
+          </a:p>
+        </p:txBody>
+      </p:sp>
+      <p:sp>
+        <p:nvSpPr>
           <p:cNvPr id="16" name="TextBox 15"/>
           <p:cNvSpPr txBox="1"/>
           <p:nvPr/>
         </p:nvSpPr>
         <p:spPr>
           <a:xfrm>
-            <a:off x="763200" y="3780000"/>
-            <a:ext cx="468000" cy="158400"/>
+            <a:off x="1303200" y="3549600"/>
+            <a:ext cx="5652000" cy="655200"/>
           </a:xfrm>
           <a:prstGeom prst="rect">
             <a:avLst/>
@@ -3900,7 +3919,7 @@
           </a:bodyPr>
           <a:lstStyle/>
           <a:p>
-            <a:pPr algn="ctr">
+            <a:pPr algn="l">
               <a:spcBef>
                 <a:spcPts val="0"/>
               </a:spcBef>
@@ -3911,36 +3930,13 @@
             <a:r>
               <a:rPr sz="800" b="1" i="0">
                 <a:solidFill>
-                  <a:srgbClr val="FFFFFF"/>
-                </a:solidFill>
-                <a:latin typeface="Arial"/>
-              </a:rPr>
-              <a:t>0:10</a:t>
-            </a:r>
-          </a:p>
-        </p:txBody>
-      </p:sp>
-      <p:sp>
-        <p:nvSpPr>
-          <p:cNvPr id="17" name="TextBox 16"/>
-          <p:cNvSpPr txBox="1"/>
-          <p:nvPr/>
-        </p:nvSpPr>
-        <p:spPr>
-          <a:xfrm>
-            <a:off x="1303200" y="3549600"/>
-            <a:ext cx="5652000" cy="655200"/>
-          </a:xfrm>
-          <a:prstGeom prst="rect">
-            <a:avLst/>
-          </a:prstGeom>
-          <a:noFill/>
-        </p:spPr>
-        <p:txBody>
-          <a:bodyPr wrap="square" tIns="0" bIns="0" lIns="18000" rIns="18000">
-            <a:spAutoFit/>
-          </a:bodyPr>
-          <a:lstStyle/>
+                  <a:srgbClr val="4388BC"/>
+                </a:solidFill>
+                <a:latin typeface="Arial"/>
+              </a:rPr>
+              <a:t>8 min</a:t>
+            </a:r>
+          </a:p>
           <a:p>
             <a:pPr algn="l">
               <a:spcBef>
@@ -3951,13 +3947,13 @@
               </a:spcAft>
             </a:pPr>
             <a:r>
-              <a:rPr sz="800" b="1" i="0">
-                <a:solidFill>
-                  <a:srgbClr val="4388BC"/>
-                </a:solidFill>
-                <a:latin typeface="Arial"/>
-              </a:rPr>
-              <a:t>8 min</a:t>
+              <a:rPr sz="900" b="1" i="0">
+                <a:solidFill>
+                  <a:srgbClr val="2B2B2B"/>
+                </a:solidFill>
+                <a:latin typeface="Arial"/>
+              </a:rPr>
+              <a:t>Nos appareils : le cœur du problème</a:t>
             </a:r>
           </a:p>
           <a:p>
@@ -3970,31 +3966,12 @@
               </a:spcAft>
             </a:pPr>
             <a:r>
-              <a:rPr sz="900" b="1" i="0">
+              <a:rPr sz="800" b="0" i="0">
                 <a:solidFill>
                   <a:srgbClr val="2B2B2B"/>
                 </a:solidFill>
                 <a:latin typeface="Arial"/>
               </a:rPr>
-              <a:t>Nos appareils : le cœur du problème</a:t>
-            </a:r>
-          </a:p>
-          <a:p>
-            <a:pPr algn="l">
-              <a:spcBef>
-                <a:spcPts val="0"/>
-              </a:spcBef>
-              <a:spcAft>
-                <a:spcPts val="100"/>
-              </a:spcAft>
-            </a:pPr>
-            <a:r>
-              <a:rPr sz="800" b="0" i="0">
-                <a:solidFill>
-                  <a:srgbClr val="2B2B2B"/>
-                </a:solidFill>
-                <a:latin typeface="Arial"/>
-              </a:rPr>
               <a:t>. La fabrication de nos appareils numériques est de loin la source d'impact la plus importante — bien plus que leur utilisation quotidienne.</a:t>
             </a:r>
           </a:p>
@@ -4002,7 +3979,7 @@
       </p:sp>
       <p:sp>
         <p:nvSpPr>
-          <p:cNvPr id="18" name="Rectangle 17"/>
+          <p:cNvPr id="17" name="Rectangle 16"/>
           <p:cNvSpPr/>
           <p:nvPr/>
         </p:nvSpPr>
@@ -4045,7 +4022,7 @@
       </p:sp>
       <p:sp>
         <p:nvSpPr>
-          <p:cNvPr id="19" name="Rectangle 18"/>
+          <p:cNvPr id="18" name="Rectangle 17"/>
           <p:cNvSpPr/>
           <p:nvPr/>
         </p:nvSpPr>
@@ -4086,7 +4063,7 @@
       </p:sp>
       <p:sp>
         <p:nvSpPr>
-          <p:cNvPr id="20" name="Rectangle 19"/>
+          <p:cNvPr id="19" name="Rectangle 18"/>
           <p:cNvSpPr/>
           <p:nvPr/>
         </p:nvSpPr>
@@ -4127,14 +4104,56 @@
       </p:sp>
       <p:sp>
         <p:nvSpPr>
+          <p:cNvPr id="20" name="TextBox 19"/>
+          <p:cNvSpPr txBox="1"/>
+          <p:nvPr/>
+        </p:nvSpPr>
+        <p:spPr>
+          <a:xfrm>
+            <a:off x="763200" y="4528800"/>
+            <a:ext cx="468000" cy="158400"/>
+          </a:xfrm>
+          <a:prstGeom prst="rect">
+            <a:avLst/>
+          </a:prstGeom>
+          <a:noFill/>
+        </p:spPr>
+        <p:txBody>
+          <a:bodyPr wrap="square" tIns="0" bIns="0" lIns="18000" rIns="18000">
+            <a:spAutoFit/>
+          </a:bodyPr>
+          <a:lstStyle/>
+          <a:p>
+            <a:pPr algn="ctr">
+              <a:spcBef>
+                <a:spcPts val="0"/>
+              </a:spcBef>
+              <a:spcAft>
+                <a:spcPts val="100"/>
+              </a:spcAft>
+            </a:pPr>
+            <a:r>
+              <a:rPr sz="800" b="1" i="0">
+                <a:solidFill>
+                  <a:srgbClr val="FFFFFF"/>
+                </a:solidFill>
+                <a:latin typeface="Arial"/>
+              </a:rPr>
+              <a:t>0:18</a:t>
+            </a:r>
+          </a:p>
+        </p:txBody>
+      </p:sp>
+      <p:sp>
+        <p:nvSpPr>
           <p:cNvPr id="21" name="TextBox 20"/>
           <p:cNvSpPr txBox="1"/>
           <p:nvPr/>
         </p:nvSpPr>
         <p:spPr>
           <a:xfrm>
-            <a:off x="763200" y="4528800"/>
-            <a:ext cx="468000" cy="158400"/>
+            <a:off x="1303200" y="4298400"/>
+            <a:ext cx="5652000" cy="655200"/>
           </a:xfrm>
           <a:prstGeom prst="rect">
             <a:avLst/>
@@ -4147,7 +4166,7 @@
           </a:bodyPr>
           <a:lstStyle/>
           <a:p>
-            <a:pPr algn="ctr">
+            <a:pPr algn="l">
               <a:spcBef>
                 <a:spcPts val="0"/>
               </a:spcBef>
@@ -4158,36 +4177,13 @@
             <a:r>
               <a:rPr sz="800" b="1" i="0">
                 <a:solidFill>
-                  <a:srgbClr val="FFFFFF"/>
-                </a:solidFill>
-                <a:latin typeface="Arial"/>
-              </a:rPr>
-              <a:t>0:18</a:t>
-            </a:r>
-          </a:p>
-        </p:txBody>
-      </p:sp>
-      <p:sp>
-        <p:nvSpPr>
-          <p:cNvPr id="22" name="TextBox 21"/>
-          <p:cNvSpPr txBox="1"/>
-          <p:nvPr/>
-        </p:nvSpPr>
-        <p:spPr>
-          <a:xfrm>
-            <a:off x="1303200" y="4298400"/>
-            <a:ext cx="5652000" cy="655200"/>
-          </a:xfrm>
-          <a:prstGeom prst="rect">
-            <a:avLst/>
-          </a:prstGeom>
-          <a:noFill/>
-        </p:spPr>
-        <p:txBody>
-          <a:bodyPr wrap="square" tIns="0" bIns="0" lIns="18000" rIns="18000">
-            <a:spAutoFit/>
-          </a:bodyPr>
-          <a:lstStyle/>
+                  <a:srgbClr val="187C88"/>
+                </a:solidFill>
+                <a:latin typeface="Arial"/>
+              </a:rPr>
+              <a:t>8 min</a:t>
+            </a:r>
+          </a:p>
           <a:p>
             <a:pPr algn="l">
               <a:spcBef>
@@ -4198,13 +4194,13 @@
               </a:spcAft>
             </a:pPr>
             <a:r>
-              <a:rPr sz="800" b="1" i="0">
-                <a:solidFill>
-                  <a:srgbClr val="187C88"/>
-                </a:solidFill>
-                <a:latin typeface="Arial"/>
-              </a:rPr>
-              <a:t>8 min</a:t>
+              <a:rPr sz="900" b="1" i="0">
+                <a:solidFill>
+                  <a:srgbClr val="2B2B2B"/>
+                </a:solidFill>
+                <a:latin typeface="Arial"/>
+              </a:rPr>
+              <a:t>L'usage quotidien : des impacts souvent invisibl…</a:t>
             </a:r>
           </a:p>
           <a:p>
@@ -4217,31 +4213,12 @@
               </a:spcAft>
             </a:pPr>
             <a:r>
-              <a:rPr sz="900" b="1" i="0">
+              <a:rPr sz="800" b="0" i="0">
                 <a:solidFill>
                   <a:srgbClr val="2B2B2B"/>
                 </a:solidFill>
                 <a:latin typeface="Arial"/>
               </a:rPr>
-              <a:t>L'usage quotidien : des impacts souvent invisibl…</a:t>
-            </a:r>
-          </a:p>
-          <a:p>
-            <a:pPr algn="l">
-              <a:spcBef>
-                <a:spcPts val="0"/>
-              </a:spcBef>
-              <a:spcAft>
-                <a:spcPts val="100"/>
-              </a:spcAft>
-            </a:pPr>
-            <a:r>
-              <a:rPr sz="800" b="0" i="0">
-                <a:solidFill>
-                  <a:srgbClr val="2B2B2B"/>
-                </a:solidFill>
-                <a:latin typeface="Arial"/>
-              </a:rPr>
               <a:t>. Streaming vidéo</a:t>
             </a:r>
           </a:p>
@@ -4249,7 +4226,7 @@
       </p:sp>
       <p:sp>
         <p:nvSpPr>
-          <p:cNvPr id="23" name="Rectangle 22"/>
+          <p:cNvPr id="22" name="Rectangle 21"/>
           <p:cNvSpPr/>
           <p:nvPr/>
         </p:nvSpPr>
@@ -4292,7 +4269,7 @@
       </p:sp>
       <p:sp>
         <p:nvSpPr>
-          <p:cNvPr id="24" name="Rectangle 23"/>
+          <p:cNvPr id="23" name="Rectangle 22"/>
           <p:cNvSpPr/>
           <p:nvPr/>
         </p:nvSpPr>
@@ -4333,7 +4310,7 @@
       </p:sp>
       <p:sp>
         <p:nvSpPr>
-          <p:cNvPr id="25" name="Rectangle 24"/>
+          <p:cNvPr id="24" name="Rectangle 23"/>
           <p:cNvSpPr/>
           <p:nvPr/>
         </p:nvSpPr>
@@ -4374,14 +4351,56 @@
       </p:sp>
       <p:sp>
         <p:nvSpPr>
+          <p:cNvPr id="25" name="TextBox 24"/>
+          <p:cNvSpPr txBox="1"/>
+          <p:nvPr/>
+        </p:nvSpPr>
+        <p:spPr>
+          <a:xfrm>
+            <a:off x="763200" y="5277600"/>
+            <a:ext cx="468000" cy="158400"/>
+          </a:xfrm>
+          <a:prstGeom prst="rect">
+            <a:avLst/>
+          </a:prstGeom>
+          <a:noFill/>
+        </p:spPr>
+        <p:txBody>
+          <a:bodyPr wrap="square" tIns="0" bIns="0" lIns="18000" rIns="18000">
+            <a:spAutoFit/>
+          </a:bodyPr>
+          <a:lstStyle/>
+          <a:p>
+            <a:pPr algn="ctr">
+              <a:spcBef>
+                <a:spcPts val="0"/>
+              </a:spcBef>
+              <a:spcAft>
+                <a:spcPts val="100"/>
+              </a:spcAft>
+            </a:pPr>
+            <a:r>
+              <a:rPr sz="800" b="1" i="0">
+                <a:solidFill>
+                  <a:srgbClr val="FFFFFF"/>
+                </a:solidFill>
+                <a:latin typeface="Arial"/>
+              </a:rPr>
+              <a:t>0:26</a:t>
+            </a:r>
+          </a:p>
+        </p:txBody>
+      </p:sp>
+      <p:sp>
+        <p:nvSpPr>
           <p:cNvPr id="26" name="TextBox 25"/>
           <p:cNvSpPr txBox="1"/>
           <p:nvPr/>
         </p:nvSpPr>
         <p:spPr>
           <a:xfrm>
-            <a:off x="763200" y="5277600"/>
-            <a:ext cx="468000" cy="158400"/>
+            <a:off x="1303200" y="5047200"/>
+            <a:ext cx="5652000" cy="655200"/>
           </a:xfrm>
           <a:prstGeom prst="rect">
             <a:avLst/>
@@ -4394,7 +4413,7 @@
           </a:bodyPr>
           <a:lstStyle/>
           <a:p>
-            <a:pPr algn="ctr">
+            <a:pPr algn="l">
               <a:spcBef>
                 <a:spcPts val="0"/>
               </a:spcBef>
@@ -4405,36 +4424,13 @@
             <a:r>
               <a:rPr sz="800" b="1" i="0">
                 <a:solidFill>
-                  <a:srgbClr val="FFFFFF"/>
-                </a:solidFill>
-                <a:latin typeface="Arial"/>
-              </a:rPr>
-              <a:t>0:26</a:t>
-            </a:r>
-          </a:p>
-        </p:txBody>
-      </p:sp>
-      <p:sp>
-        <p:nvSpPr>
-          <p:cNvPr id="27" name="TextBox 26"/>
-          <p:cNvSpPr txBox="1"/>
-          <p:nvPr/>
-        </p:nvSpPr>
-        <p:spPr>
-          <a:xfrm>
-            <a:off x="1303200" y="5047200"/>
-            <a:ext cx="5652000" cy="655200"/>
-          </a:xfrm>
-          <a:prstGeom prst="rect">
-            <a:avLst/>
-          </a:prstGeom>
-          <a:noFill/>
-        </p:spPr>
-        <p:txBody>
-          <a:bodyPr wrap="square" tIns="0" bIns="0" lIns="18000" rIns="18000">
-            <a:spAutoFit/>
-          </a:bodyPr>
-          <a:lstStyle/>
+                  <a:srgbClr val="4388BC"/>
+                </a:solidFill>
+                <a:latin typeface="Arial"/>
+              </a:rPr>
+              <a:t>8 min</a:t>
+            </a:r>
+          </a:p>
           <a:p>
             <a:pPr algn="l">
               <a:spcBef>
@@ -4445,13 +4441,13 @@
               </a:spcAft>
             </a:pPr>
             <a:r>
-              <a:rPr sz="800" b="1" i="0">
-                <a:solidFill>
-                  <a:srgbClr val="4388BC"/>
-                </a:solidFill>
-                <a:latin typeface="Arial"/>
-              </a:rPr>
-              <a:t>8 min</a:t>
+              <a:rPr sz="900" b="1" i="0">
+                <a:solidFill>
+                  <a:srgbClr val="2B2B2B"/>
+                </a:solidFill>
+                <a:latin typeface="Arial"/>
+              </a:rPr>
+              <a:t>Les data centers : des usines énergivores</a:t>
             </a:r>
           </a:p>
           <a:p>
@@ -4464,31 +4460,12 @@
               </a:spcAft>
             </a:pPr>
             <a:r>
-              <a:rPr sz="900" b="1" i="0">
+              <a:rPr sz="800" b="0" i="0">
                 <a:solidFill>
                   <a:srgbClr val="2B2B2B"/>
                 </a:solidFill>
                 <a:latin typeface="Arial"/>
               </a:rPr>
-              <a:t>Les data centers : des usines énergivores</a:t>
-            </a:r>
-          </a:p>
-          <a:p>
-            <a:pPr algn="l">
-              <a:spcBef>
-                <a:spcPts val="0"/>
-              </a:spcBef>
-              <a:spcAft>
-                <a:spcPts val="100"/>
-              </a:spcAft>
-            </a:pPr>
-            <a:r>
-              <a:rPr sz="800" b="0" i="0">
-                <a:solidFill>
-                  <a:srgbClr val="2B2B2B"/>
-                </a:solidFill>
-                <a:latin typeface="Arial"/>
-              </a:rPr>
               <a:t>. Ces infrastructures discrètes sont le moteur de notre monde numérique, hébergeant nos données et applications. Cependant, leur fonctionnement est incroyablement gourmand en ressources, notamment pour le refroidissement des serveurs et le maintien d'une température stable.</a:t>
             </a:r>
           </a:p>
@@ -4496,7 +4473,7 @@
       </p:sp>
       <p:sp>
         <p:nvSpPr>
-          <p:cNvPr id="28" name="Rectangle 27"/>
+          <p:cNvPr id="27" name="Rectangle 26"/>
           <p:cNvSpPr/>
           <p:nvPr/>
         </p:nvSpPr>
@@ -4539,7 +4516,7 @@
       </p:sp>
       <p:sp>
         <p:nvSpPr>
-          <p:cNvPr id="29" name="Rectangle 28"/>
+          <p:cNvPr id="28" name="Rectangle 27"/>
           <p:cNvSpPr/>
           <p:nvPr/>
         </p:nvSpPr>
@@ -4580,7 +4557,7 @@
       </p:sp>
       <p:sp>
         <p:nvSpPr>
-          <p:cNvPr id="30" name="Rectangle 29"/>
+          <p:cNvPr id="29" name="Rectangle 28"/>
           <p:cNvSpPr/>
           <p:nvPr/>
         </p:nvSpPr>
@@ -4621,14 +4598,56 @@
       </p:sp>
       <p:sp>
         <p:nvSpPr>
+          <p:cNvPr id="30" name="TextBox 29"/>
+          <p:cNvSpPr txBox="1"/>
+          <p:nvPr/>
+        </p:nvSpPr>
+        <p:spPr>
+          <a:xfrm>
+            <a:off x="763200" y="6026399"/>
+            <a:ext cx="468000" cy="158400"/>
+          </a:xfrm>
+          <a:prstGeom prst="rect">
+            <a:avLst/>
+          </a:prstGeom>
+          <a:noFill/>
+        </p:spPr>
+        <p:txBody>
+          <a:bodyPr wrap="square" tIns="0" bIns="0" lIns="18000" rIns="18000">
+            <a:spAutoFit/>
+          </a:bodyPr>
+          <a:lstStyle/>
+          <a:p>
+            <a:pPr algn="ctr">
+              <a:spcBef>
+                <a:spcPts val="0"/>
+              </a:spcBef>
+              <a:spcAft>
+                <a:spcPts val="100"/>
+              </a:spcAft>
+            </a:pPr>
+            <a:r>
+              <a:rPr sz="800" b="1" i="0">
+                <a:solidFill>
+                  <a:srgbClr val="FFFFFF"/>
+                </a:solidFill>
+                <a:latin typeface="Arial"/>
+              </a:rPr>
+              <a:t>0:34</a:t>
+            </a:r>
+          </a:p>
+        </p:txBody>
+      </p:sp>
+      <p:sp>
+        <p:nvSpPr>
           <p:cNvPr id="31" name="TextBox 30"/>
           <p:cNvSpPr txBox="1"/>
           <p:nvPr/>
         </p:nvSpPr>
         <p:spPr>
           <a:xfrm>
-            <a:off x="763200" y="6026399"/>
-            <a:ext cx="468000" cy="158400"/>
+            <a:off x="1303200" y="5796000"/>
+            <a:ext cx="5652000" cy="655200"/>
           </a:xfrm>
           <a:prstGeom prst="rect">
             <a:avLst/>
@@ -4641,7 +4660,7 @@
           </a:bodyPr>
           <a:lstStyle/>
           <a:p>
-            <a:pPr algn="ctr">
+            <a:pPr algn="l">
               <a:spcBef>
                 <a:spcPts val="0"/>
               </a:spcBef>
@@ -4652,36 +4671,13 @@
             <a:r>
               <a:rPr sz="800" b="1" i="0">
                 <a:solidFill>
-                  <a:srgbClr val="FFFFFF"/>
-                </a:solidFill>
-                <a:latin typeface="Arial"/>
-              </a:rPr>
-              <a:t>0:34</a:t>
-            </a:r>
-          </a:p>
-        </p:txBody>
-      </p:sp>
-      <p:sp>
-        <p:nvSpPr>
-          <p:cNvPr id="32" name="TextBox 31"/>
-          <p:cNvSpPr txBox="1"/>
-          <p:nvPr/>
-        </p:nvSpPr>
-        <p:spPr>
-          <a:xfrm>
-            <a:off x="1303200" y="5796000"/>
-            <a:ext cx="5652000" cy="655200"/>
-          </a:xfrm>
-          <a:prstGeom prst="rect">
-            <a:avLst/>
-          </a:prstGeom>
-          <a:noFill/>
-        </p:spPr>
-        <p:txBody>
-          <a:bodyPr wrap="square" tIns="0" bIns="0" lIns="18000" rIns="18000">
-            <a:spAutoFit/>
-          </a:bodyPr>
-          <a:lstStyle/>
+                  <a:srgbClr val="187C88"/>
+                </a:solidFill>
+                <a:latin typeface="Arial"/>
+              </a:rPr>
+              <a:t>8 min</a:t>
+            </a:r>
+          </a:p>
           <a:p>
             <a:pPr algn="l">
               <a:spcBef>
@@ -4692,13 +4688,13 @@
               </a:spcAft>
             </a:pPr>
             <a:r>
-              <a:rPr sz="800" b="1" i="0">
-                <a:solidFill>
-                  <a:srgbClr val="187C88"/>
-                </a:solidFill>
-                <a:latin typeface="Arial"/>
-              </a:rPr>
-              <a:t>8 min</a:t>
+              <a:rPr sz="900" b="1" i="0">
+                <a:solidFill>
+                  <a:srgbClr val="2B2B2B"/>
+                </a:solidFill>
+                <a:latin typeface="Arial"/>
+              </a:rPr>
+              <a:t>La montagne de déchets électroniques</a:t>
             </a:r>
           </a:p>
           <a:p>
@@ -4711,31 +4707,12 @@
               </a:spcAft>
             </a:pPr>
             <a:r>
-              <a:rPr sz="900" b="1" i="0">
+              <a:rPr sz="800" b="0" i="0">
                 <a:solidFill>
                   <a:srgbClr val="2B2B2B"/>
                 </a:solidFill>
                 <a:latin typeface="Arial"/>
               </a:rPr>
-              <a:t>La montagne de déchets électroniques</a:t>
-            </a:r>
-          </a:p>
-          <a:p>
-            <a:pPr algn="l">
-              <a:spcBef>
-                <a:spcPts val="0"/>
-              </a:spcBef>
-              <a:spcAft>
-                <a:spcPts val="100"/>
-              </a:spcAft>
-            </a:pPr>
-            <a:r>
-              <a:rPr sz="800" b="0" i="0">
-                <a:solidFill>
-                  <a:srgbClr val="2B2B2B"/>
-                </a:solidFill>
-                <a:latin typeface="Arial"/>
-              </a:rPr>
               <a:t>. Les Déchets d'Équipements Électriques et Électroniques (DEEE), ou "e-waste", représentent aujourd'hui le flux de déchets qui croît le plus rapidement dans le monde. C'est une problématique environnementale et sanitaire majeure.</a:t>
             </a:r>
           </a:p>
@@ -4743,7 +4720,7 @@
       </p:sp>
       <p:sp>
         <p:nvSpPr>
-          <p:cNvPr id="33" name="Rectangle 32"/>
+          <p:cNvPr id="32" name="Rectangle 31"/>
           <p:cNvSpPr/>
           <p:nvPr/>
         </p:nvSpPr>
@@ -4786,7 +4763,7 @@
       </p:sp>
       <p:sp>
         <p:nvSpPr>
-          <p:cNvPr id="34" name="Rectangle 33"/>
+          <p:cNvPr id="33" name="Rectangle 32"/>
           <p:cNvSpPr/>
           <p:nvPr/>
         </p:nvSpPr>
@@ -4827,7 +4804,7 @@
       </p:sp>
       <p:sp>
         <p:nvSpPr>
-          <p:cNvPr id="35" name="Rectangle 34"/>
+          <p:cNvPr id="34" name="Rectangle 33"/>
           <p:cNvSpPr/>
           <p:nvPr/>
         </p:nvSpPr>
@@ -4868,14 +4845,56 @@
       </p:sp>
       <p:sp>
         <p:nvSpPr>
+          <p:cNvPr id="35" name="TextBox 34"/>
+          <p:cNvSpPr txBox="1"/>
+          <p:nvPr/>
+        </p:nvSpPr>
+        <p:spPr>
+          <a:xfrm>
+            <a:off x="763200" y="6775200"/>
+            <a:ext cx="468000" cy="158400"/>
+          </a:xfrm>
+          <a:prstGeom prst="rect">
+            <a:avLst/>
+          </a:prstGeom>
+          <a:noFill/>
+        </p:spPr>
+        <p:txBody>
+          <a:bodyPr wrap="square" tIns="0" bIns="0" lIns="18000" rIns="18000">
+            <a:spAutoFit/>
+          </a:bodyPr>
+          <a:lstStyle/>
+          <a:p>
+            <a:pPr algn="ctr">
+              <a:spcBef>
+                <a:spcPts val="0"/>
+              </a:spcBef>
+              <a:spcAft>
+                <a:spcPts val="100"/>
+              </a:spcAft>
+            </a:pPr>
+            <a:r>
+              <a:rPr sz="800" b="1" i="0">
+                <a:solidFill>
+                  <a:srgbClr val="FFFFFF"/>
+                </a:solidFill>
+                <a:latin typeface="Arial"/>
+              </a:rPr>
+              <a:t>0:42</a:t>
+            </a:r>
+          </a:p>
+        </p:txBody>
+      </p:sp>
+      <p:sp>
+        <p:nvSpPr>
           <p:cNvPr id="36" name="TextBox 35"/>
           <p:cNvSpPr txBox="1"/>
           <p:nvPr/>
         </p:nvSpPr>
         <p:spPr>
           <a:xfrm>
-            <a:off x="763200" y="6775200"/>
-            <a:ext cx="468000" cy="158400"/>
+            <a:off x="1303200" y="6544800"/>
+            <a:ext cx="5652000" cy="655200"/>
           </a:xfrm>
           <a:prstGeom prst="rect">
             <a:avLst/>
@@ -4888,7 +4907,7 @@
           </a:bodyPr>
           <a:lstStyle/>
           <a:p>
-            <a:pPr algn="ctr">
+            <a:pPr algn="l">
               <a:spcBef>
                 <a:spcPts val="0"/>
               </a:spcBef>
@@ -4899,36 +4918,13 @@
             <a:r>
               <a:rPr sz="800" b="1" i="0">
                 <a:solidFill>
-                  <a:srgbClr val="FFFFFF"/>
-                </a:solidFill>
-                <a:latin typeface="Arial"/>
-              </a:rPr>
-              <a:t>0:42</a:t>
-            </a:r>
-          </a:p>
-        </p:txBody>
-      </p:sp>
-      <p:sp>
-        <p:nvSpPr>
-          <p:cNvPr id="37" name="TextBox 36"/>
-          <p:cNvSpPr txBox="1"/>
-          <p:nvPr/>
-        </p:nvSpPr>
-        <p:spPr>
-          <a:xfrm>
-            <a:off x="1303200" y="6544800"/>
-            <a:ext cx="5652000" cy="655200"/>
-          </a:xfrm>
-          <a:prstGeom prst="rect">
-            <a:avLst/>
-          </a:prstGeom>
-          <a:noFill/>
-        </p:spPr>
-        <p:txBody>
-          <a:bodyPr wrap="square" tIns="0" bIns="0" lIns="18000" rIns="18000">
-            <a:spAutoFit/>
-          </a:bodyPr>
-          <a:lstStyle/>
+                  <a:srgbClr val="5EB3D2"/>
+                </a:solidFill>
+                <a:latin typeface="Arial"/>
+              </a:rPr>
+              <a:t>8 min</a:t>
+            </a:r>
+          </a:p>
           <a:p>
             <a:pPr algn="l">
               <a:spcBef>
@@ -4939,13 +4935,13 @@
               </a:spcAft>
             </a:pPr>
             <a:r>
-              <a:rPr sz="800" b="1" i="0">
-                <a:solidFill>
-                  <a:srgbClr val="5EB3D2"/>
-                </a:solidFill>
-                <a:latin typeface="Arial"/>
-              </a:rPr>
-              <a:t>8 min</a:t>
+              <a:rPr sz="900" b="1" i="0">
+                <a:solidFill>
+                  <a:srgbClr val="2B2B2B"/>
+                </a:solidFill>
+                <a:latin typeface="Arial"/>
+              </a:rPr>
+              <a:t>L'obsolescence : le piège du renouvellement</a:t>
             </a:r>
           </a:p>
           <a:p>
@@ -4958,31 +4954,12 @@
               </a:spcAft>
             </a:pPr>
             <a:r>
-              <a:rPr sz="900" b="1" i="0">
+              <a:rPr sz="800" b="0" i="0">
                 <a:solidFill>
                   <a:srgbClr val="2B2B2B"/>
                 </a:solidFill>
                 <a:latin typeface="Arial"/>
               </a:rPr>
-              <a:t>L'obsolescence : le piège du renouvellement</a:t>
-            </a:r>
-          </a:p>
-          <a:p>
-            <a:pPr algn="l">
-              <a:spcBef>
-                <a:spcPts val="0"/>
-              </a:spcBef>
-              <a:spcAft>
-                <a:spcPts val="100"/>
-              </a:spcAft>
-            </a:pPr>
-            <a:r>
-              <a:rPr sz="800" b="0" i="0">
-                <a:solidFill>
-                  <a:srgbClr val="2B2B2B"/>
-                </a:solidFill>
-                <a:latin typeface="Arial"/>
-              </a:rPr>
               <a:t>. L'obsolescence, qu'elle soit programmée ou perçue, est un facteur majeur de l'empreinte environnementale du numérique. Elle nous pousse à renouveler nos appareils bien avant la fin de leur durée de vie potentielle.</a:t>
             </a:r>
           </a:p>
@@ -4990,7 +4967,7 @@
       </p:sp>
       <p:sp>
         <p:nvSpPr>
-          <p:cNvPr id="38" name="Rectangle 37"/>
+          <p:cNvPr id="37" name="Rectangle 36"/>
           <p:cNvSpPr/>
           <p:nvPr/>
         </p:nvSpPr>
@@ -5033,7 +5010,7 @@
       </p:sp>
       <p:sp>
         <p:nvSpPr>
-          <p:cNvPr id="39" name="Rectangle 38"/>
+          <p:cNvPr id="38" name="Rectangle 37"/>
           <p:cNvSpPr/>
           <p:nvPr/>
         </p:nvSpPr>
@@ -5074,7 +5051,7 @@
       </p:sp>
       <p:sp>
         <p:nvSpPr>
-          <p:cNvPr id="40" name="Rectangle 39"/>
+          <p:cNvPr id="39" name="Rectangle 38"/>
           <p:cNvSpPr/>
           <p:nvPr/>
         </p:nvSpPr>
@@ -5115,14 +5092,56 @@
       </p:sp>
       <p:sp>
         <p:nvSpPr>
+          <p:cNvPr id="40" name="TextBox 39"/>
+          <p:cNvSpPr txBox="1"/>
+          <p:nvPr/>
+        </p:nvSpPr>
+        <p:spPr>
+          <a:xfrm>
+            <a:off x="763200" y="7523999"/>
+            <a:ext cx="468000" cy="158400"/>
+          </a:xfrm>
+          <a:prstGeom prst="rect">
+            <a:avLst/>
+          </a:prstGeom>
+          <a:noFill/>
+        </p:spPr>
+        <p:txBody>
+          <a:bodyPr wrap="square" tIns="0" bIns="0" lIns="18000" rIns="18000">
+            <a:spAutoFit/>
+          </a:bodyPr>
+          <a:lstStyle/>
+          <a:p>
+            <a:pPr algn="ctr">
+              <a:spcBef>
+                <a:spcPts val="0"/>
+              </a:spcBef>
+              <a:spcAft>
+                <a:spcPts val="100"/>
+              </a:spcAft>
+            </a:pPr>
+            <a:r>
+              <a:rPr sz="800" b="1" i="0">
+                <a:solidFill>
+                  <a:srgbClr val="FFFFFF"/>
+                </a:solidFill>
+                <a:latin typeface="Arial"/>
+              </a:rPr>
+              <a:t>0:50</a:t>
+            </a:r>
+          </a:p>
+        </p:txBody>
+      </p:sp>
+      <p:sp>
+        <p:nvSpPr>
           <p:cNvPr id="41" name="TextBox 40"/>
           <p:cNvSpPr txBox="1"/>
           <p:nvPr/>
         </p:nvSpPr>
         <p:spPr>
           <a:xfrm>
-            <a:off x="763200" y="7523999"/>
-            <a:ext cx="468000" cy="158400"/>
+            <a:off x="1303200" y="7293599"/>
+            <a:ext cx="5652000" cy="655200"/>
           </a:xfrm>
           <a:prstGeom prst="rect">
             <a:avLst/>
@@ -5135,7 +5154,7 @@
           </a:bodyPr>
           <a:lstStyle/>
           <a:p>
-            <a:pPr algn="ctr">
+            <a:pPr algn="l">
               <a:spcBef>
                 <a:spcPts val="0"/>
               </a:spcBef>
@@ -5146,36 +5165,13 @@
             <a:r>
               <a:rPr sz="800" b="1" i="0">
                 <a:solidFill>
-                  <a:srgbClr val="FFFFFF"/>
-                </a:solidFill>
-                <a:latin typeface="Arial"/>
-              </a:rPr>
-              <a:t>0:50</a:t>
-            </a:r>
-          </a:p>
-        </p:txBody>
-      </p:sp>
-      <p:sp>
-        <p:nvSpPr>
-          <p:cNvPr id="42" name="TextBox 41"/>
-          <p:cNvSpPr txBox="1"/>
-          <p:nvPr/>
-        </p:nvSpPr>
-        <p:spPr>
-          <a:xfrm>
-            <a:off x="1303200" y="7293599"/>
-            <a:ext cx="5652000" cy="655200"/>
-          </a:xfrm>
-          <a:prstGeom prst="rect">
-            <a:avLst/>
-          </a:prstGeom>
-          <a:noFill/>
-        </p:spPr>
-        <p:txBody>
-          <a:bodyPr wrap="square" tIns="0" bIns="0" lIns="18000" rIns="18000">
-            <a:spAutoFit/>
-          </a:bodyPr>
-          <a:lstStyle/>
+                  <a:srgbClr val="5EB3D2"/>
+                </a:solidFill>
+                <a:latin typeface="Arial"/>
+              </a:rPr>
+              <a:t>8 min</a:t>
+            </a:r>
+          </a:p>
           <a:p>
             <a:pPr algn="l">
               <a:spcBef>
@@ -5186,13 +5182,13 @@
               </a:spcAft>
             </a:pPr>
             <a:r>
-              <a:rPr sz="800" b="1" i="0">
-                <a:solidFill>
-                  <a:srgbClr val="5EB3D2"/>
-                </a:solidFill>
-                <a:latin typeface="Arial"/>
-              </a:rPr>
-              <a:t>8 min</a:t>
+              <a:rPr sz="900" b="1" i="0">
+                <a:solidFill>
+                  <a:srgbClr val="2B2B2B"/>
+                </a:solidFill>
+                <a:latin typeface="Arial"/>
+              </a:rPr>
+              <a:t>Allonger la vie de ses appareils</a:t>
             </a:r>
           </a:p>
           <a:p>
@@ -5205,31 +5201,12 @@
               </a:spcAft>
             </a:pPr>
             <a:r>
-              <a:rPr sz="900" b="1" i="0">
+              <a:rPr sz="800" b="0" i="0">
                 <a:solidFill>
                   <a:srgbClr val="2B2B2B"/>
                 </a:solidFill>
                 <a:latin typeface="Arial"/>
               </a:rPr>
-              <a:t>Allonger la vie de ses appareils</a:t>
-            </a:r>
-          </a:p>
-          <a:p>
-            <a:pPr algn="l">
-              <a:spcBef>
-                <a:spcPts val="0"/>
-              </a:spcBef>
-              <a:spcAft>
-                <a:spcPts val="100"/>
-              </a:spcAft>
-            </a:pPr>
-            <a:r>
-              <a:rPr sz="800" b="0" i="0">
-                <a:solidFill>
-                  <a:srgbClr val="2B2B2B"/>
-                </a:solidFill>
-                <a:latin typeface="Arial"/>
-              </a:rPr>
               <a:t>. Plutôt que de céder à l'obsolescence programmée ou perçue, adoptons des gestes simples pour prolonger la durée de vie de nos équipements. Chaque année gagnée, c'est une réduction significative de leur empreinte environnementale.</a:t>
             </a:r>
           </a:p>
@@ -5237,7 +5214,7 @@
       </p:sp>
       <p:sp>
         <p:nvSpPr>
-          <p:cNvPr id="43" name="Rectangle 42"/>
+          <p:cNvPr id="42" name="Rectangle 41"/>
           <p:cNvSpPr/>
           <p:nvPr/>
         </p:nvSpPr>
@@ -5280,7 +5257,7 @@
       </p:sp>
       <p:sp>
         <p:nvSpPr>
-          <p:cNvPr id="44" name="Rectangle 43"/>
+          <p:cNvPr id="43" name="Rectangle 42"/>
           <p:cNvSpPr/>
           <p:nvPr/>
         </p:nvSpPr>
@@ -5321,7 +5298,7 @@
       </p:sp>
       <p:sp>
         <p:nvSpPr>
-          <p:cNvPr id="45" name="Rectangle 44"/>
+          <p:cNvPr id="44" name="Rectangle 43"/>
           <p:cNvSpPr/>
           <p:nvPr/>
         </p:nvSpPr>
@@ -5362,14 +5339,56 @@
       </p:sp>
       <p:sp>
         <p:nvSpPr>
+          <p:cNvPr id="45" name="TextBox 44"/>
+          <p:cNvSpPr txBox="1"/>
+          <p:nvPr/>
+        </p:nvSpPr>
+        <p:spPr>
+          <a:xfrm>
+            <a:off x="763200" y="8272799"/>
+            <a:ext cx="468000" cy="158400"/>
+          </a:xfrm>
+          <a:prstGeom prst="rect">
+            <a:avLst/>
+          </a:prstGeom>
+          <a:noFill/>
+        </p:spPr>
+        <p:txBody>
+          <a:bodyPr wrap="square" tIns="0" bIns="0" lIns="18000" rIns="18000">
+            <a:spAutoFit/>
+          </a:bodyPr>
+          <a:lstStyle/>
+          <a:p>
+            <a:pPr algn="ctr">
+              <a:spcBef>
+                <a:spcPts val="0"/>
+              </a:spcBef>
+              <a:spcAft>
+                <a:spcPts val="100"/>
+              </a:spcAft>
+            </a:pPr>
+            <a:r>
+              <a:rPr sz="800" b="1" i="0">
+                <a:solidFill>
+                  <a:srgbClr val="FFFFFF"/>
+                </a:solidFill>
+                <a:latin typeface="Arial"/>
+              </a:rPr>
+              <a:t>0:58</a:t>
+            </a:r>
+          </a:p>
+        </p:txBody>
+      </p:sp>
+      <p:sp>
+        <p:nvSpPr>
           <p:cNvPr id="46" name="TextBox 45"/>
           <p:cNvSpPr txBox="1"/>
           <p:nvPr/>
         </p:nvSpPr>
         <p:spPr>
           <a:xfrm>
-            <a:off x="763200" y="8272799"/>
-            <a:ext cx="468000" cy="158400"/>
+            <a:off x="1303200" y="8042399"/>
+            <a:ext cx="5652000" cy="655200"/>
           </a:xfrm>
           <a:prstGeom prst="rect">
             <a:avLst/>
@@ -5382,7 +5401,7 @@
           </a:bodyPr>
           <a:lstStyle/>
           <a:p>
-            <a:pPr algn="ctr">
+            <a:pPr algn="l">
               <a:spcBef>
                 <a:spcPts val="0"/>
               </a:spcBef>
@@ -5393,36 +5412,13 @@
             <a:r>
               <a:rPr sz="800" b="1" i="0">
                 <a:solidFill>
-                  <a:srgbClr val="FFFFFF"/>
-                </a:solidFill>
-                <a:latin typeface="Arial"/>
-              </a:rPr>
-              <a:t>0:58</a:t>
-            </a:r>
-          </a:p>
-        </p:txBody>
-      </p:sp>
-      <p:sp>
-        <p:nvSpPr>
-          <p:cNvPr id="47" name="TextBox 46"/>
-          <p:cNvSpPr txBox="1"/>
-          <p:nvPr/>
-        </p:nvSpPr>
-        <p:spPr>
-          <a:xfrm>
-            <a:off x="1303200" y="8042399"/>
-            <a:ext cx="5652000" cy="655200"/>
-          </a:xfrm>
-          <a:prstGeom prst="rect">
-            <a:avLst/>
-          </a:prstGeom>
-          <a:noFill/>
-        </p:spPr>
-        <p:txBody>
-          <a:bodyPr wrap="square" tIns="0" bIns="0" lIns="18000" rIns="18000">
-            <a:spAutoFit/>
-          </a:bodyPr>
-          <a:lstStyle/>
+                  <a:srgbClr val="4388BC"/>
+                </a:solidFill>
+                <a:latin typeface="Arial"/>
+              </a:rPr>
+              <a:t>8 min</a:t>
+            </a:r>
+          </a:p>
           <a:p>
             <a:pPr algn="l">
               <a:spcBef>
@@ -5433,13 +5429,13 @@
               </a:spcAft>
             </a:pPr>
             <a:r>
-              <a:rPr sz="800" b="1" i="0">
-                <a:solidFill>
-                  <a:srgbClr val="4388BC"/>
-                </a:solidFill>
-                <a:latin typeface="Arial"/>
-              </a:rPr>
-              <a:t>8 min</a:t>
+              <a:rPr sz="900" b="1" i="0">
+                <a:solidFill>
+                  <a:srgbClr val="2B2B2B"/>
+                </a:solidFill>
+                <a:latin typeface="Arial"/>
+              </a:rPr>
+              <a:t>La sobriété numérique au quotidien</a:t>
             </a:r>
           </a:p>
           <a:p>
@@ -5452,31 +5448,12 @@
               </a:spcAft>
             </a:pPr>
             <a:r>
-              <a:rPr sz="900" b="1" i="0">
+              <a:rPr sz="800" b="0" i="0">
                 <a:solidFill>
                   <a:srgbClr val="2B2B2B"/>
                 </a:solidFill>
                 <a:latin typeface="Arial"/>
               </a:rPr>
-              <a:t>La sobriété numérique au quotidien</a:t>
-            </a:r>
-          </a:p>
-          <a:p>
-            <a:pPr algn="l">
-              <a:spcBef>
-                <a:spcPts val="0"/>
-              </a:spcBef>
-              <a:spcAft>
-                <a:spcPts val="100"/>
-              </a:spcAft>
-            </a:pPr>
-            <a:r>
-              <a:rPr sz="800" b="0" i="0">
-                <a:solidFill>
-                  <a:srgbClr val="2B2B2B"/>
-                </a:solidFill>
-                <a:latin typeface="Arial"/>
-              </a:rPr>
               <a:t>. Adopter de petits gestes au quotidien peut avoir un impact significatif sur la réduction de votre empreinte numérique. Chaque action compte pour une consommation plus responsable des ressources.</a:t>
             </a:r>
           </a:p>
@@ -5484,7 +5461,7 @@
       </p:sp>
       <p:sp>
         <p:nvSpPr>
-          <p:cNvPr id="48" name="Rectangle 47"/>
+          <p:cNvPr id="47" name="Rectangle 46"/>
           <p:cNvSpPr/>
           <p:nvPr/>
         </p:nvSpPr>
@@ -5527,7 +5504,7 @@
       </p:sp>
       <p:sp>
         <p:nvSpPr>
-          <p:cNvPr id="49" name="Rectangle 48"/>
+          <p:cNvPr id="48" name="Rectangle 47"/>
           <p:cNvSpPr/>
           <p:nvPr/>
         </p:nvSpPr>
@@ -5568,7 +5545,7 @@
       </p:sp>
       <p:sp>
         <p:nvSpPr>
-          <p:cNvPr id="50" name="Rectangle 49"/>
+          <p:cNvPr id="49" name="Rectangle 48"/>
           <p:cNvSpPr/>
           <p:nvPr/>
         </p:nvSpPr>
@@ -5609,7 +5586,7 @@
       </p:sp>
       <p:sp>
         <p:nvSpPr>
-          <p:cNvPr id="51" name="TextBox 50"/>
+          <p:cNvPr id="50" name="TextBox 49"/>
           <p:cNvSpPr txBox="1"/>
           <p:nvPr/>
         </p:nvSpPr>
@@ -5651,7 +5628,7 @@
       </p:sp>
       <p:sp>
         <p:nvSpPr>
-          <p:cNvPr id="52" name="TextBox 51"/>
+          <p:cNvPr id="51" name="TextBox 50"/>
           <p:cNvSpPr txBox="1"/>
           <p:nvPr/>
         </p:nvSpPr>
@@ -5742,9 +5719,12 @@
   <p:cSld>
     <p:bg>
       <p:bgPr>
-        <a:solidFill>
-          <a:srgbClr val="FFFFFF"/>
-        </a:solidFill>
+        <a:blipFill>
+          <a:blip r:embed="rId2"/>
+          <a:stretch>
+            <a:fillRect/>
+          </a:stretch>
+        </a:blipFill>
         <a:effectLst/>
       </p:bgPr>
     </p:bg>
@@ -5755,35 +5735,9 @@
         <p:nvPr/>
       </p:nvGrpSpPr>
       <p:grpSpPr/>
-      <p:pic>
-        <p:nvPicPr>
-          <p:cNvPr id="2" name="Picture 1" descr="bg-p2.png"/>
-          <p:cNvPicPr>
-            <a:picLocks noChangeAspect="1"/>
-          </p:cNvPicPr>
-          <p:nvPr/>
-        </p:nvPicPr>
-        <p:blipFill>
-          <a:blip r:embed="rId2">
-            <a:alphaModFix amt="80000"/>
-          </a:blip>
-          <a:stretch>
-            <a:fillRect/>
-          </a:stretch>
-        </p:blipFill>
-        <p:spPr>
-          <a:xfrm>
-            <a:off x="0" y="0"/>
-            <a:ext cx="7556399" cy="10692000"/>
-          </a:xfrm>
-          <a:prstGeom prst="rect">
-            <a:avLst/>
-          </a:prstGeom>
-        </p:spPr>
-      </p:pic>
-      <p:sp>
-        <p:nvSpPr>
-          <p:cNvPr id="3" name="Rectangle 2"/>
+      <p:sp>
+        <p:nvSpPr>
+          <p:cNvPr id="2" name="Rectangle 1"/>
           <p:cNvSpPr/>
           <p:nvPr/>
         </p:nvSpPr>
@@ -5826,7 +5780,7 @@
       </p:sp>
       <p:sp>
         <p:nvSpPr>
-          <p:cNvPr id="4" name="Rectangle 3"/>
+          <p:cNvPr id="3" name="Rectangle 2"/>
           <p:cNvSpPr/>
           <p:nvPr/>
         </p:nvSpPr>
@@ -5867,7 +5821,7 @@
       </p:sp>
       <p:sp>
         <p:nvSpPr>
-          <p:cNvPr id="5" name="Rectangle 4"/>
+          <p:cNvPr id="4" name="Rectangle 3"/>
           <p:cNvSpPr/>
           <p:nvPr/>
         </p:nvSpPr>
@@ -5908,14 +5862,56 @@
       </p:sp>
       <p:sp>
         <p:nvSpPr>
+          <p:cNvPr id="5" name="TextBox 4"/>
+          <p:cNvSpPr txBox="1"/>
+          <p:nvPr/>
+        </p:nvSpPr>
+        <p:spPr>
+          <a:xfrm>
+            <a:off x="763200" y="835200"/>
+            <a:ext cx="468000" cy="158400"/>
+          </a:xfrm>
+          <a:prstGeom prst="rect">
+            <a:avLst/>
+          </a:prstGeom>
+          <a:noFill/>
+        </p:spPr>
+        <p:txBody>
+          <a:bodyPr wrap="square" tIns="0" bIns="0" lIns="18000" rIns="18000">
+            <a:spAutoFit/>
+          </a:bodyPr>
+          <a:lstStyle/>
+          <a:p>
+            <a:pPr algn="ctr">
+              <a:spcBef>
+                <a:spcPts val="0"/>
+              </a:spcBef>
+              <a:spcAft>
+                <a:spcPts val="100"/>
+              </a:spcAft>
+            </a:pPr>
+            <a:r>
+              <a:rPr sz="800" b="1" i="0">
+                <a:solidFill>
+                  <a:srgbClr val="FFFFFF"/>
+                </a:solidFill>
+                <a:latin typeface="Arial"/>
+              </a:rPr>
+              <a:t>1:14</a:t>
+            </a:r>
+          </a:p>
+        </p:txBody>
+      </p:sp>
+      <p:sp>
+        <p:nvSpPr>
           <p:cNvPr id="6" name="TextBox 5"/>
           <p:cNvSpPr txBox="1"/>
           <p:nvPr/>
         </p:nvSpPr>
         <p:spPr>
           <a:xfrm>
-            <a:off x="763200" y="835200"/>
-            <a:ext cx="468000" cy="158400"/>
+            <a:off x="1303200" y="604800"/>
+            <a:ext cx="5652000" cy="655200"/>
           </a:xfrm>
           <a:prstGeom prst="rect">
             <a:avLst/>
@@ -5928,7 +5924,7 @@
           </a:bodyPr>
           <a:lstStyle/>
           <a:p>
-            <a:pPr algn="ctr">
+            <a:pPr algn="l">
               <a:spcBef>
                 <a:spcPts val="0"/>
               </a:spcBef>
@@ -5939,36 +5935,13 @@
             <a:r>
               <a:rPr sz="800" b="1" i="0">
                 <a:solidFill>
-                  <a:srgbClr val="FFFFFF"/>
-                </a:solidFill>
-                <a:latin typeface="Arial"/>
-              </a:rPr>
-              <a:t>1:14</a:t>
-            </a:r>
-          </a:p>
-        </p:txBody>
-      </p:sp>
-      <p:sp>
-        <p:nvSpPr>
-          <p:cNvPr id="7" name="TextBox 6"/>
-          <p:cNvSpPr txBox="1"/>
-          <p:nvPr/>
-        </p:nvSpPr>
-        <p:spPr>
-          <a:xfrm>
-            <a:off x="1303200" y="604800"/>
-            <a:ext cx="5652000" cy="655200"/>
-          </a:xfrm>
-          <a:prstGeom prst="rect">
-            <a:avLst/>
-          </a:prstGeom>
-          <a:noFill/>
-        </p:spPr>
-        <p:txBody>
-          <a:bodyPr wrap="square" tIns="0" bIns="0" lIns="18000" rIns="18000">
-            <a:spAutoFit/>
-          </a:bodyPr>
-          <a:lstStyle/>
+                  <a:srgbClr val="4388BC"/>
+                </a:solidFill>
+                <a:latin typeface="Arial"/>
+              </a:rPr>
+              <a:t>8 min</a:t>
+            </a:r>
+          </a:p>
           <a:p>
             <a:pPr algn="l">
               <a:spcBef>
@@ -5979,13 +5952,13 @@
               </a:spcAft>
             </a:pPr>
             <a:r>
-              <a:rPr sz="800" b="1" i="0">
-                <a:solidFill>
-                  <a:srgbClr val="4388BC"/>
-                </a:solidFill>
-                <a:latin typeface="Arial"/>
-              </a:rPr>
-              <a:t>8 min</a:t>
+              <a:rPr sz="900" b="1" i="0">
+                <a:solidFill>
+                  <a:srgbClr val="2B2B2B"/>
+                </a:solidFill>
+                <a:latin typeface="Arial"/>
+              </a:rPr>
+              <a:t>Des solutions collectives et réglementaires</a:t>
             </a:r>
           </a:p>
           <a:p>
@@ -5998,31 +5971,12 @@
               </a:spcAft>
             </a:pPr>
             <a:r>
-              <a:rPr sz="900" b="1" i="0">
+              <a:rPr sz="800" b="0" i="0">
                 <a:solidFill>
                   <a:srgbClr val="2B2B2B"/>
                 </a:solidFill>
                 <a:latin typeface="Arial"/>
               </a:rPr>
-              <a:t>Des solutions collectives et réglementaires</a:t>
-            </a:r>
-          </a:p>
-          <a:p>
-            <a:pPr algn="l">
-              <a:spcBef>
-                <a:spcPts val="0"/>
-              </a:spcBef>
-              <a:spcAft>
-                <a:spcPts val="100"/>
-              </a:spcAft>
-            </a:pPr>
-            <a:r>
-              <a:rPr sz="800" b="0" i="0">
-                <a:solidFill>
-                  <a:srgbClr val="2B2B2B"/>
-                </a:solidFill>
-                <a:latin typeface="Arial"/>
-              </a:rPr>
               <a:t>. Face aux enjeux du numérique, des cadres réglementaires et des initiatives collectives émergent pour encourager des pratiques plus durables. Ces efforts visent à transformer en profondeur nos modes de production et de consommation.</a:t>
             </a:r>
           </a:p>
@@ -6030,7 +5984,7 @@
       </p:sp>
       <p:sp>
         <p:nvSpPr>
-          <p:cNvPr id="8" name="Rectangle 7"/>
+          <p:cNvPr id="7" name="Rectangle 6"/>
           <p:cNvSpPr/>
           <p:nvPr/>
         </p:nvSpPr>
@@ -6073,7 +6027,7 @@
       </p:sp>
       <p:sp>
         <p:nvSpPr>
-          <p:cNvPr id="9" name="Rectangle 8"/>
+          <p:cNvPr id="8" name="Rectangle 7"/>
           <p:cNvSpPr/>
           <p:nvPr/>
         </p:nvSpPr>
@@ -6114,7 +6068,7 @@
       </p:sp>
       <p:sp>
         <p:nvSpPr>
-          <p:cNvPr id="10" name="Rectangle 9"/>
+          <p:cNvPr id="9" name="Rectangle 8"/>
           <p:cNvSpPr/>
           <p:nvPr/>
         </p:nvSpPr>
@@ -6155,14 +6109,56 @@
       </p:sp>
       <p:sp>
         <p:nvSpPr>
+          <p:cNvPr id="10" name="TextBox 9"/>
+          <p:cNvSpPr txBox="1"/>
+          <p:nvPr/>
+        </p:nvSpPr>
+        <p:spPr>
+          <a:xfrm>
+            <a:off x="763200" y="1584000"/>
+            <a:ext cx="468000" cy="158400"/>
+          </a:xfrm>
+          <a:prstGeom prst="rect">
+            <a:avLst/>
+          </a:prstGeom>
+          <a:noFill/>
+        </p:spPr>
+        <p:txBody>
+          <a:bodyPr wrap="square" tIns="0" bIns="0" lIns="18000" rIns="18000">
+            <a:spAutoFit/>
+          </a:bodyPr>
+          <a:lstStyle/>
+          <a:p>
+            <a:pPr algn="ctr">
+              <a:spcBef>
+                <a:spcPts val="0"/>
+              </a:spcBef>
+              <a:spcAft>
+                <a:spcPts val="100"/>
+              </a:spcAft>
+            </a:pPr>
+            <a:r>
+              <a:rPr sz="800" b="1" i="0">
+                <a:solidFill>
+                  <a:srgbClr val="FFFFFF"/>
+                </a:solidFill>
+                <a:latin typeface="Arial"/>
+              </a:rPr>
+              <a:t>1:22</a:t>
+            </a:r>
+          </a:p>
+        </p:txBody>
+      </p:sp>
+      <p:sp>
+        <p:nvSpPr>
           <p:cNvPr id="11" name="TextBox 10"/>
           <p:cNvSpPr txBox="1"/>
           <p:nvPr/>
         </p:nvSpPr>
         <p:spPr>
           <a:xfrm>
-            <a:off x="763200" y="1584000"/>
-            <a:ext cx="468000" cy="158400"/>
+            <a:off x="1303200" y="1353600"/>
+            <a:ext cx="5652000" cy="655200"/>
           </a:xfrm>
           <a:prstGeom prst="rect">
             <a:avLst/>
@@ -6175,7 +6171,7 @@
           </a:bodyPr>
           <a:lstStyle/>
           <a:p>
-            <a:pPr algn="ctr">
+            <a:pPr algn="l">
               <a:spcBef>
                 <a:spcPts val="0"/>
               </a:spcBef>
@@ -6186,36 +6182,13 @@
             <a:r>
               <a:rPr sz="800" b="1" i="0">
                 <a:solidFill>
-                  <a:srgbClr val="FFFFFF"/>
-                </a:solidFill>
-                <a:latin typeface="Arial"/>
-              </a:rPr>
-              <a:t>1:22</a:t>
-            </a:r>
-          </a:p>
-        </p:txBody>
-      </p:sp>
-      <p:sp>
-        <p:nvSpPr>
-          <p:cNvPr id="12" name="TextBox 11"/>
-          <p:cNvSpPr txBox="1"/>
-          <p:nvPr/>
-        </p:nvSpPr>
-        <p:spPr>
-          <a:xfrm>
-            <a:off x="1303200" y="1353600"/>
-            <a:ext cx="5652000" cy="655200"/>
-          </a:xfrm>
-          <a:prstGeom prst="rect">
-            <a:avLst/>
-          </a:prstGeom>
-          <a:noFill/>
-        </p:spPr>
-        <p:txBody>
-          <a:bodyPr wrap="square" tIns="0" bIns="0" lIns="18000" rIns="18000">
-            <a:spAutoFit/>
-          </a:bodyPr>
-          <a:lstStyle/>
+                  <a:srgbClr val="187C88"/>
+                </a:solidFill>
+                <a:latin typeface="Arial"/>
+              </a:rPr>
+              <a:t>8 min</a:t>
+            </a:r>
+          </a:p>
           <a:p>
             <a:pPr algn="l">
               <a:spcBef>
@@ -6226,13 +6199,13 @@
               </a:spcAft>
             </a:pPr>
             <a:r>
-              <a:rPr sz="800" b="1" i="0">
-                <a:solidFill>
-                  <a:srgbClr val="187C88"/>
-                </a:solidFill>
-                <a:latin typeface="Arial"/>
-              </a:rPr>
-              <a:t>8 min</a:t>
+              <a:rPr sz="900" b="1" i="0">
+                <a:solidFill>
+                  <a:srgbClr val="2B2B2B"/>
+                </a:solidFill>
+                <a:latin typeface="Arial"/>
+              </a:rPr>
+              <a:t>À vous de jouer !</a:t>
             </a:r>
           </a:p>
           <a:p>
@@ -6245,31 +6218,12 @@
               </a:spcAft>
             </a:pPr>
             <a:r>
-              <a:rPr sz="900" b="1" i="0">
+              <a:rPr sz="800" b="0" i="0">
                 <a:solidFill>
                   <a:srgbClr val="2B2B2B"/>
                 </a:solidFill>
                 <a:latin typeface="Arial"/>
               </a:rPr>
-              <a:t>À vous de jouer !</a:t>
-            </a:r>
-          </a:p>
-          <a:p>
-            <a:pPr algn="l">
-              <a:spcBef>
-                <a:spcPts val="0"/>
-              </a:spcBef>
-              <a:spcAft>
-                <a:spcPts val="100"/>
-              </a:spcAft>
-            </a:pPr>
-            <a:r>
-              <a:rPr sz="800" b="0" i="0">
-                <a:solidFill>
-                  <a:srgbClr val="2B2B2B"/>
-                </a:solidFill>
-                <a:latin typeface="Arial"/>
-              </a:rPr>
               <a:t>. Répondez à ces questions individuellement ou en petits groupes, puis partagez vos réflexions avec le reste de l'atelier.</a:t>
             </a:r>
           </a:p>
@@ -6277,7 +6231,7 @@
       </p:sp>
       <p:sp>
         <p:nvSpPr>
-          <p:cNvPr id="13" name="Rectangle 12"/>
+          <p:cNvPr id="12" name="Rectangle 11"/>
           <p:cNvSpPr/>
           <p:nvPr/>
         </p:nvSpPr>
@@ -6320,7 +6274,7 @@
       </p:sp>
       <p:sp>
         <p:nvSpPr>
-          <p:cNvPr id="14" name="Rectangle 13"/>
+          <p:cNvPr id="13" name="Rectangle 12"/>
           <p:cNvSpPr/>
           <p:nvPr/>
         </p:nvSpPr>
@@ -6361,7 +6315,7 @@
       </p:sp>
       <p:sp>
         <p:nvSpPr>
-          <p:cNvPr id="15" name="TextBox 14"/>
+          <p:cNvPr id="14" name="TextBox 13"/>
           <p:cNvSpPr txBox="1"/>
           <p:nvPr/>
         </p:nvSpPr>
@@ -6403,7 +6357,7 @@
       </p:sp>
       <p:sp>
         <p:nvSpPr>
-          <p:cNvPr id="16" name="Rectangle 15"/>
+          <p:cNvPr id="15" name="Rectangle 14"/>
           <p:cNvSpPr/>
           <p:nvPr/>
         </p:nvSpPr>
@@ -6444,7 +6398,7 @@
       </p:sp>
       <p:sp>
         <p:nvSpPr>
-          <p:cNvPr id="17" name="TextBox 16"/>
+          <p:cNvPr id="16" name="TextBox 15"/>
           <p:cNvSpPr txBox="1"/>
           <p:nvPr/>
         </p:nvSpPr>
@@ -6571,7 +6525,7 @@
       </p:sp>
       <p:sp>
         <p:nvSpPr>
-          <p:cNvPr id="18" name="Rectangle 17"/>
+          <p:cNvPr id="17" name="Rectangle 16"/>
           <p:cNvSpPr/>
           <p:nvPr/>
         </p:nvSpPr>
@@ -6612,7 +6566,7 @@
       </p:sp>
       <p:sp>
         <p:nvSpPr>
-          <p:cNvPr id="19" name="TextBox 18"/>
+          <p:cNvPr id="18" name="TextBox 17"/>
           <p:cNvSpPr txBox="1"/>
           <p:nvPr/>
         </p:nvSpPr>
@@ -6739,7 +6693,7 @@
       </p:sp>
       <p:sp>
         <p:nvSpPr>
-          <p:cNvPr id="20" name="Rectangle 19"/>
+          <p:cNvPr id="19" name="Rectangle 18"/>
           <p:cNvSpPr/>
           <p:nvPr/>
         </p:nvSpPr>
@@ -6780,7 +6734,7 @@
       </p:sp>
       <p:sp>
         <p:nvSpPr>
-          <p:cNvPr id="21" name="TextBox 20"/>
+          <p:cNvPr id="20" name="TextBox 19"/>
           <p:cNvSpPr txBox="1"/>
           <p:nvPr/>
         </p:nvSpPr>
@@ -6907,7 +6861,7 @@
       </p:sp>
       <p:sp>
         <p:nvSpPr>
-          <p:cNvPr id="22" name="Rectangle 21"/>
+          <p:cNvPr id="21" name="Rectangle 20"/>
           <p:cNvSpPr/>
           <p:nvPr/>
         </p:nvSpPr>
@@ -6948,7 +6902,7 @@
       </p:sp>
       <p:sp>
         <p:nvSpPr>
-          <p:cNvPr id="23" name="TextBox 22"/>
+          <p:cNvPr id="22" name="TextBox 21"/>
           <p:cNvSpPr txBox="1"/>
           <p:nvPr/>
         </p:nvSpPr>
